--- a/public/lessons/year-6-maths/summer/week-25/compare-cuboid-volumes/teaching-powerpoint-v1.pptx
+++ b/public/lessons/year-6-maths/summer/week-25/compare-cuboid-volumes/teaching-powerpoint-v1.pptx
@@ -2,24 +2,24 @@
 <file path=ppt/presentation.xml><?xml version="1.0" encoding="utf-8"?>
 <p:presentation xmlns:p="http://schemas.openxmlformats.org/presentationml/2006/main">
   <p:sldMasterIdLst>
-    <p:sldMasterId xmlns:r="http://schemas.openxmlformats.org/officeDocument/2006/relationships" id="2147483648" r:id="R405e67532fd14aa6"/>
+    <p:sldMasterId xmlns:r="http://schemas.openxmlformats.org/officeDocument/2006/relationships" id="2147483648" r:id="R8001b83d2c974aa1"/>
   </p:sldMasterIdLst>
   <p:notesMasterIdLst>
-    <p:notesMasterId xmlns:r="http://schemas.openxmlformats.org/officeDocument/2006/relationships" r:id="R472427a327484af2"/>
+    <p:notesMasterId xmlns:r="http://schemas.openxmlformats.org/officeDocument/2006/relationships" r:id="R981b7c4cad7c487d"/>
   </p:notesMasterIdLst>
   <p:sldIdLst>
-    <p:sldId xmlns:r="http://schemas.openxmlformats.org/officeDocument/2006/relationships" id="256" r:id="R87c39bcec2524f57"/>
-    <p:sldId xmlns:r="http://schemas.openxmlformats.org/officeDocument/2006/relationships" id="257" r:id="R62fd0411f16d4eca"/>
-    <p:sldId xmlns:r="http://schemas.openxmlformats.org/officeDocument/2006/relationships" id="258" r:id="R84ff2ecffa5e4ac4"/>
-    <p:sldId xmlns:r="http://schemas.openxmlformats.org/officeDocument/2006/relationships" id="259" r:id="R9c8ec8cc5c4f47d6"/>
-    <p:sldId xmlns:r="http://schemas.openxmlformats.org/officeDocument/2006/relationships" id="260" r:id="R2b60d17409854b71"/>
-    <p:sldId xmlns:r="http://schemas.openxmlformats.org/officeDocument/2006/relationships" id="261" r:id="R9d243c0a7c244bf5"/>
-    <p:sldId xmlns:r="http://schemas.openxmlformats.org/officeDocument/2006/relationships" id="262" r:id="R52ffb0b66ff646b2"/>
-    <p:sldId xmlns:r="http://schemas.openxmlformats.org/officeDocument/2006/relationships" id="263" r:id="Rc271a88441af4a20"/>
-    <p:sldId xmlns:r="http://schemas.openxmlformats.org/officeDocument/2006/relationships" id="264" r:id="R8c1efc6b75df4db6"/>
-    <p:sldId xmlns:r="http://schemas.openxmlformats.org/officeDocument/2006/relationships" id="265" r:id="Rb4a81f3cad154a3c"/>
-    <p:sldId xmlns:r="http://schemas.openxmlformats.org/officeDocument/2006/relationships" id="266" r:id="R90dd7442d36b492e"/>
-    <p:sldId xmlns:r="http://schemas.openxmlformats.org/officeDocument/2006/relationships" id="267" r:id="R22b6c189589b4d7c"/>
+    <p:sldId xmlns:r="http://schemas.openxmlformats.org/officeDocument/2006/relationships" id="256" r:id="R492c2f5326da4fbc"/>
+    <p:sldId xmlns:r="http://schemas.openxmlformats.org/officeDocument/2006/relationships" id="257" r:id="R4dbcec6625474764"/>
+    <p:sldId xmlns:r="http://schemas.openxmlformats.org/officeDocument/2006/relationships" id="258" r:id="R2ea77d076cd94215"/>
+    <p:sldId xmlns:r="http://schemas.openxmlformats.org/officeDocument/2006/relationships" id="259" r:id="Rc4e79fbb331f4d4a"/>
+    <p:sldId xmlns:r="http://schemas.openxmlformats.org/officeDocument/2006/relationships" id="260" r:id="R896a1a53478045fb"/>
+    <p:sldId xmlns:r="http://schemas.openxmlformats.org/officeDocument/2006/relationships" id="261" r:id="R837cd331b07b4c06"/>
+    <p:sldId xmlns:r="http://schemas.openxmlformats.org/officeDocument/2006/relationships" id="262" r:id="Rb4d170393a954b83"/>
+    <p:sldId xmlns:r="http://schemas.openxmlformats.org/officeDocument/2006/relationships" id="263" r:id="Rdcdba0f7c1e347ac"/>
+    <p:sldId xmlns:r="http://schemas.openxmlformats.org/officeDocument/2006/relationships" id="264" r:id="R14760aa5d1c741d1"/>
+    <p:sldId xmlns:r="http://schemas.openxmlformats.org/officeDocument/2006/relationships" id="265" r:id="R5c0916a463784cf7"/>
+    <p:sldId xmlns:r="http://schemas.openxmlformats.org/officeDocument/2006/relationships" id="266" r:id="R5a80d809170f4b0d"/>
+    <p:sldId xmlns:r="http://schemas.openxmlformats.org/officeDocument/2006/relationships" id="267" r:id="R27385028e7fd4054"/>
   </p:sldIdLst>
   <p:sldSz cx="12192000" cy="6858000"/>
   <p:notesSz cx="6858000" cy="9144000"/>
@@ -873,7 +873,7 @@
           <a:lstStyle xmlns:a="http://schemas.openxmlformats.org/drawingml/2006/main"/>
           <a:p xmlns:a="http://schemas.openxmlformats.org/drawingml/2006/main">
             <a:r>
-              <a:t>I do. Reveal the question, setup and each calculation stage one click at a time. Pupils watch before copying. Model answer: Both are 240 cm3.</a:t>
+              <a:t>I do. Reveal the question, then reveal each mathematical change one click at a time. Point to the numbers and operation that changed before moving to the next line. Final answer: Both are 240 cm3.</a:t>
             </a:r>
           </a:p>
         </p:txBody>
@@ -1291,7 +1291,7 @@
   </p:cSld>
   <p:clrMap bg1="lt1" tx1="dk1" bg2="lt2" tx2="dk2" accent1="accent1" accent2="accent2" accent3="accent3" accent4="accent4" accent5="accent5" accent6="accent6" hlink="hlink" folHlink="folHlink"/>
   <p:sldLayoutIdLst>
-    <p:sldLayoutId xmlns:r="http://schemas.openxmlformats.org/officeDocument/2006/relationships" id="2147483649" r:id="R86a2c2d8ff674421"/>
+    <p:sldLayoutId xmlns:r="http://schemas.openxmlformats.org/officeDocument/2006/relationships" id="2147483649" r:id="R0d01449e789f4540"/>
   </p:sldLayoutIdLst>
   <p:txStyles>
     <p:titleStyle>
@@ -1842,7 +1842,7 @@
           <p:cNvPr id="12" name="">
             <a:extLst xmlns:a="http://schemas.openxmlformats.org/drawingml/2006/main">
               <a:ext uri="{FF2B5EF4-FFF2-40B4-BE49-F238E27FC236}">
-                <a16:creationId xmlns:a16="http://schemas.microsoft.com/office/drawing/2014/main" id="{E251993B-5482-48F1-A9EA-81A9E8D281E7}"/>
+                <a16:creationId xmlns:a16="http://schemas.microsoft.com/office/drawing/2014/main" id="{0186A640-4A9D-4B2E-984B-C01517D529CE}"/>
               </a:ext>
             </a:extLst>
           </p:cNvPr>
@@ -1874,7 +1874,7 @@
           <p:cNvPr id="2" name="">
             <a:extLst xmlns:a="http://schemas.openxmlformats.org/drawingml/2006/main">
               <a:ext uri="{FF2B5EF4-FFF2-40B4-BE49-F238E27FC236}">
-                <a16:creationId xmlns:a16="http://schemas.microsoft.com/office/drawing/2014/main" id="{F71BFA79-9626-47C4-AFC9-99CD8A4B1690}"/>
+                <a16:creationId xmlns:a16="http://schemas.microsoft.com/office/drawing/2014/main" id="{D60D42FD-5FC9-4B3C-A866-60DBECBE5CAB}"/>
               </a:ext>
             </a:extLst>
           </p:cNvPr>
@@ -1931,7 +1931,7 @@
           <p:cNvPr id="3" name="">
             <a:extLst xmlns:a="http://schemas.openxmlformats.org/drawingml/2006/main">
               <a:ext uri="{FF2B5EF4-FFF2-40B4-BE49-F238E27FC236}">
-                <a16:creationId xmlns:a16="http://schemas.microsoft.com/office/drawing/2014/main" id="{5838FEEF-B545-4A42-84F9-E012480AABC8}"/>
+                <a16:creationId xmlns:a16="http://schemas.microsoft.com/office/drawing/2014/main" id="{B22A6412-35BD-4320-9590-C000C8D54DEF}"/>
               </a:ext>
             </a:extLst>
           </p:cNvPr>
@@ -1965,7 +1965,7 @@
           <p:cNvPr id="4" name="">
             <a:extLst xmlns:a="http://schemas.openxmlformats.org/drawingml/2006/main">
               <a:ext uri="{FF2B5EF4-FFF2-40B4-BE49-F238E27FC236}">
-                <a16:creationId xmlns:a16="http://schemas.microsoft.com/office/drawing/2014/main" id="{C31894B8-26BB-4326-8BA0-1A03BEBBA3C1}"/>
+                <a16:creationId xmlns:a16="http://schemas.microsoft.com/office/drawing/2014/main" id="{2D99DF24-504D-42D6-AE77-C5D6F9923EE8}"/>
               </a:ext>
             </a:extLst>
           </p:cNvPr>
@@ -2022,7 +2022,7 @@
           <p:cNvPr id="5" name="">
             <a:extLst xmlns:a="http://schemas.openxmlformats.org/drawingml/2006/main">
               <a:ext uri="{FF2B5EF4-FFF2-40B4-BE49-F238E27FC236}">
-                <a16:creationId xmlns:a16="http://schemas.microsoft.com/office/drawing/2014/main" id="{3ECE56FB-0642-44D3-A4F7-A971A925F51B}"/>
+                <a16:creationId xmlns:a16="http://schemas.microsoft.com/office/drawing/2014/main" id="{C9642464-33EE-43F8-B98B-3D82A6842ADA}"/>
               </a:ext>
             </a:extLst>
           </p:cNvPr>
@@ -2079,7 +2079,7 @@
           <p:cNvPr id="6" name="">
             <a:extLst xmlns:a="http://schemas.openxmlformats.org/drawingml/2006/main">
               <a:ext uri="{FF2B5EF4-FFF2-40B4-BE49-F238E27FC236}">
-                <a16:creationId xmlns:a16="http://schemas.microsoft.com/office/drawing/2014/main" id="{511DD7A0-0BB5-4105-B389-375B1C4E0701}"/>
+                <a16:creationId xmlns:a16="http://schemas.microsoft.com/office/drawing/2014/main" id="{CB0CB261-95A1-4CB5-B57E-6F4650C07148}"/>
               </a:ext>
             </a:extLst>
           </p:cNvPr>
@@ -2113,7 +2113,7 @@
           <p:cNvPr id="7" name="">
             <a:extLst xmlns:a="http://schemas.openxmlformats.org/drawingml/2006/main">
               <a:ext uri="{FF2B5EF4-FFF2-40B4-BE49-F238E27FC236}">
-                <a16:creationId xmlns:a16="http://schemas.microsoft.com/office/drawing/2014/main" id="{D604956E-51B7-4498-AA15-2877C64D7B7D}"/>
+                <a16:creationId xmlns:a16="http://schemas.microsoft.com/office/drawing/2014/main" id="{C6D553F5-FDD4-404B-A048-906012A836A9}"/>
               </a:ext>
             </a:extLst>
           </p:cNvPr>
@@ -2170,7 +2170,7 @@
           <p:cNvPr id="8" name="">
             <a:extLst xmlns:a="http://schemas.openxmlformats.org/drawingml/2006/main">
               <a:ext uri="{FF2B5EF4-FFF2-40B4-BE49-F238E27FC236}">
-                <a16:creationId xmlns:a16="http://schemas.microsoft.com/office/drawing/2014/main" id="{A143043D-2B9F-4FC1-8F70-2663CA4989D9}"/>
+                <a16:creationId xmlns:a16="http://schemas.microsoft.com/office/drawing/2014/main" id="{99824CFA-7BF8-44D0-9B7B-7FF7025F4AD7}"/>
               </a:ext>
             </a:extLst>
           </p:cNvPr>
@@ -2227,7 +2227,7 @@
           <p:cNvPr id="9" name="">
             <a:extLst xmlns:a="http://schemas.openxmlformats.org/drawingml/2006/main">
               <a:ext uri="{FF2B5EF4-FFF2-40B4-BE49-F238E27FC236}">
-                <a16:creationId xmlns:a16="http://schemas.microsoft.com/office/drawing/2014/main" id="{32BE7C17-C0F2-41E1-B632-D12DB92E2EAC}"/>
+                <a16:creationId xmlns:a16="http://schemas.microsoft.com/office/drawing/2014/main" id="{D0B8FDB0-C1B0-4BD4-A806-EC6A116655A1}"/>
               </a:ext>
             </a:extLst>
           </p:cNvPr>
@@ -2284,7 +2284,7 @@
           <p:cNvPr id="10" name="">
             <a:extLst xmlns:a="http://schemas.openxmlformats.org/drawingml/2006/main">
               <a:ext uri="{FF2B5EF4-FFF2-40B4-BE49-F238E27FC236}">
-                <a16:creationId xmlns:a16="http://schemas.microsoft.com/office/drawing/2014/main" id="{34EDDA77-5670-4876-88E7-932406990409}"/>
+                <a16:creationId xmlns:a16="http://schemas.microsoft.com/office/drawing/2014/main" id="{3AEAEE30-799F-49BA-AC93-4F3633AAD794}"/>
               </a:ext>
             </a:extLst>
           </p:cNvPr>
@@ -2341,7 +2341,7 @@
           <p:cNvPr id="11" name="">
             <a:extLst xmlns:a="http://schemas.openxmlformats.org/drawingml/2006/main">
               <a:ext uri="{FF2B5EF4-FFF2-40B4-BE49-F238E27FC236}">
-                <a16:creationId xmlns:a16="http://schemas.microsoft.com/office/drawing/2014/main" id="{80F5AD32-8E47-4396-8059-999558A75F0E}"/>
+                <a16:creationId xmlns:a16="http://schemas.microsoft.com/office/drawing/2014/main" id="{63F379B7-1188-4068-BB93-263CC746D949}"/>
               </a:ext>
             </a:extLst>
           </p:cNvPr>
@@ -2396,7 +2396,7 @@
     </p:spTree>
     <p:extLst>
       <p:ext uri="{BB962C8B-B14F-4D97-AF65-F5344CB8AC3E}">
-        <p14:creationId xmlns:p14="http://schemas.microsoft.com/office/powerpoint/2010/main" val="1878220192"/>
+        <p14:creationId xmlns:p14="http://schemas.microsoft.com/office/powerpoint/2010/main" val="345074371"/>
       </p:ext>
     </p:extLst>
   </p:cSld>
@@ -2427,7 +2427,7 @@
           <p:cNvPr id="14" name="">
             <a:extLst xmlns:a="http://schemas.openxmlformats.org/drawingml/2006/main">
               <a:ext uri="{FF2B5EF4-FFF2-40B4-BE49-F238E27FC236}">
-                <a16:creationId xmlns:a16="http://schemas.microsoft.com/office/drawing/2014/main" id="{0E42D573-39CC-4B27-B068-2B2749CD172D}"/>
+                <a16:creationId xmlns:a16="http://schemas.microsoft.com/office/drawing/2014/main" id="{33C6CE69-026A-4AD1-B351-28CC08341CFA}"/>
               </a:ext>
             </a:extLst>
           </p:cNvPr>
@@ -2459,7 +2459,7 @@
           <p:cNvPr id="2" name="">
             <a:extLst xmlns:a="http://schemas.openxmlformats.org/drawingml/2006/main">
               <a:ext uri="{FF2B5EF4-FFF2-40B4-BE49-F238E27FC236}">
-                <a16:creationId xmlns:a16="http://schemas.microsoft.com/office/drawing/2014/main" id="{356862D4-A62D-480E-8046-61331117836D}"/>
+                <a16:creationId xmlns:a16="http://schemas.microsoft.com/office/drawing/2014/main" id="{1AF7085F-846E-403E-81FA-6E72A162C30A}"/>
               </a:ext>
             </a:extLst>
           </p:cNvPr>
@@ -2516,7 +2516,7 @@
           <p:cNvPr id="3" name="">
             <a:extLst xmlns:a="http://schemas.openxmlformats.org/drawingml/2006/main">
               <a:ext uri="{FF2B5EF4-FFF2-40B4-BE49-F238E27FC236}">
-                <a16:creationId xmlns:a16="http://schemas.microsoft.com/office/drawing/2014/main" id="{C7CF1421-2947-47BE-A7A3-CE93E52AA3B1}"/>
+                <a16:creationId xmlns:a16="http://schemas.microsoft.com/office/drawing/2014/main" id="{9B905724-DD5F-4C02-947F-5022C981654A}"/>
               </a:ext>
             </a:extLst>
           </p:cNvPr>
@@ -2548,7 +2548,7 @@
           <p:cNvPr id="4" name="">
             <a:extLst xmlns:a="http://schemas.openxmlformats.org/drawingml/2006/main">
               <a:ext uri="{FF2B5EF4-FFF2-40B4-BE49-F238E27FC236}">
-                <a16:creationId xmlns:a16="http://schemas.microsoft.com/office/drawing/2014/main" id="{35693A75-A78A-4F5B-BF96-B55A7BBE076F}"/>
+                <a16:creationId xmlns:a16="http://schemas.microsoft.com/office/drawing/2014/main" id="{A4F2146A-0019-478D-ADB5-BB4BC8C50AF1}"/>
               </a:ext>
             </a:extLst>
           </p:cNvPr>
@@ -2605,7 +2605,7 @@
           <p:cNvPr id="5" name="">
             <a:extLst xmlns:a="http://schemas.openxmlformats.org/drawingml/2006/main">
               <a:ext uri="{FF2B5EF4-FFF2-40B4-BE49-F238E27FC236}">
-                <a16:creationId xmlns:a16="http://schemas.microsoft.com/office/drawing/2014/main" id="{D3DE35B2-5389-4361-8133-84A1A18235AA}"/>
+                <a16:creationId xmlns:a16="http://schemas.microsoft.com/office/drawing/2014/main" id="{A4590160-EF43-4C4E-8060-7CF821C6924A}"/>
               </a:ext>
             </a:extLst>
           </p:cNvPr>
@@ -2662,7 +2662,7 @@
           <p:cNvPr id="6" name="">
             <a:extLst xmlns:a="http://schemas.openxmlformats.org/drawingml/2006/main">
               <a:ext uri="{FF2B5EF4-FFF2-40B4-BE49-F238E27FC236}">
-                <a16:creationId xmlns:a16="http://schemas.microsoft.com/office/drawing/2014/main" id="{47D8A648-E66B-4823-ACB2-64CE748FB344}"/>
+                <a16:creationId xmlns:a16="http://schemas.microsoft.com/office/drawing/2014/main" id="{A13C8D05-1F16-4663-BB88-0BE2BE3A24B3}"/>
               </a:ext>
             </a:extLst>
           </p:cNvPr>
@@ -2719,7 +2719,7 @@
           <p:cNvPr id="7" name="">
             <a:extLst xmlns:a="http://schemas.openxmlformats.org/drawingml/2006/main">
               <a:ext uri="{FF2B5EF4-FFF2-40B4-BE49-F238E27FC236}">
-                <a16:creationId xmlns:a16="http://schemas.microsoft.com/office/drawing/2014/main" id="{67302DC9-5799-4CAB-8CD5-B03701FF3A37}"/>
+                <a16:creationId xmlns:a16="http://schemas.microsoft.com/office/drawing/2014/main" id="{8A1603E9-FDF4-4DA1-B1E6-9AD5A2578B19}"/>
               </a:ext>
             </a:extLst>
           </p:cNvPr>
@@ -2751,7 +2751,7 @@
           <p:cNvPr id="8" name="">
             <a:extLst xmlns:a="http://schemas.openxmlformats.org/drawingml/2006/main">
               <a:ext uri="{FF2B5EF4-FFF2-40B4-BE49-F238E27FC236}">
-                <a16:creationId xmlns:a16="http://schemas.microsoft.com/office/drawing/2014/main" id="{9B4D38D2-9F8B-41C7-960F-F284E0CBCE17}"/>
+                <a16:creationId xmlns:a16="http://schemas.microsoft.com/office/drawing/2014/main" id="{D51F77B3-E99C-4023-BFC0-2DFFADBC8F47}"/>
               </a:ext>
             </a:extLst>
           </p:cNvPr>
@@ -2808,7 +2808,7 @@
           <p:cNvPr id="9" name="">
             <a:extLst xmlns:a="http://schemas.openxmlformats.org/drawingml/2006/main">
               <a:ext uri="{FF2B5EF4-FFF2-40B4-BE49-F238E27FC236}">
-                <a16:creationId xmlns:a16="http://schemas.microsoft.com/office/drawing/2014/main" id="{CD2DD209-CE56-4961-9BFA-50198F24B7E0}"/>
+                <a16:creationId xmlns:a16="http://schemas.microsoft.com/office/drawing/2014/main" id="{DD3F6F9F-2BF9-47DC-814F-566C28A551EE}"/>
               </a:ext>
             </a:extLst>
           </p:cNvPr>
@@ -2865,7 +2865,7 @@
           <p:cNvPr id="10" name="">
             <a:extLst xmlns:a="http://schemas.openxmlformats.org/drawingml/2006/main">
               <a:ext uri="{FF2B5EF4-FFF2-40B4-BE49-F238E27FC236}">
-                <a16:creationId xmlns:a16="http://schemas.microsoft.com/office/drawing/2014/main" id="{D18D775F-D8D5-4F7F-B505-709CBF2CF4B2}"/>
+                <a16:creationId xmlns:a16="http://schemas.microsoft.com/office/drawing/2014/main" id="{BFA4CBFB-00C8-41FB-BA7D-ED3411ABA7B0}"/>
               </a:ext>
             </a:extLst>
           </p:cNvPr>
@@ -2922,7 +2922,7 @@
           <p:cNvPr id="11" name="">
             <a:extLst xmlns:a="http://schemas.openxmlformats.org/drawingml/2006/main">
               <a:ext uri="{FF2B5EF4-FFF2-40B4-BE49-F238E27FC236}">
-                <a16:creationId xmlns:a16="http://schemas.microsoft.com/office/drawing/2014/main" id="{641095DD-6C26-44C5-B8F9-BC530F32F36C}"/>
+                <a16:creationId xmlns:a16="http://schemas.microsoft.com/office/drawing/2014/main" id="{4EBB819C-F59C-4170-B0F8-12FF5E5718F3}"/>
               </a:ext>
             </a:extLst>
           </p:cNvPr>
@@ -2979,7 +2979,7 @@
           <p:cNvPr id="12" name="">
             <a:extLst xmlns:a="http://schemas.openxmlformats.org/drawingml/2006/main">
               <a:ext uri="{FF2B5EF4-FFF2-40B4-BE49-F238E27FC236}">
-                <a16:creationId xmlns:a16="http://schemas.microsoft.com/office/drawing/2014/main" id="{F44CF82D-DA85-4C4C-9695-F93DD9664A86}"/>
+                <a16:creationId xmlns:a16="http://schemas.microsoft.com/office/drawing/2014/main" id="{56C2BCA4-E76B-419A-A455-19285F7A1876}"/>
               </a:ext>
             </a:extLst>
           </p:cNvPr>
@@ -3036,7 +3036,7 @@
           <p:cNvPr id="13" name="">
             <a:extLst xmlns:a="http://schemas.openxmlformats.org/drawingml/2006/main">
               <a:ext uri="{FF2B5EF4-FFF2-40B4-BE49-F238E27FC236}">
-                <a16:creationId xmlns:a16="http://schemas.microsoft.com/office/drawing/2014/main" id="{9EA1095C-30D0-489C-AFF2-22FC2BE73EDF}"/>
+                <a16:creationId xmlns:a16="http://schemas.microsoft.com/office/drawing/2014/main" id="{89B4B8CF-26B3-49E6-B336-34600525DEA9}"/>
               </a:ext>
             </a:extLst>
           </p:cNvPr>
@@ -3091,7 +3091,7 @@
     </p:spTree>
     <p:extLst>
       <p:ext uri="{BB962C8B-B14F-4D97-AF65-F5344CB8AC3E}">
-        <p14:creationId xmlns:p14="http://schemas.microsoft.com/office/powerpoint/2010/main" val="196887139"/>
+        <p14:creationId xmlns:p14="http://schemas.microsoft.com/office/powerpoint/2010/main" val="217694726"/>
       </p:ext>
     </p:extLst>
   </p:cSld>
@@ -3292,7 +3292,7 @@
           <p:cNvPr id="19" name="">
             <a:extLst xmlns:a="http://schemas.openxmlformats.org/drawingml/2006/main">
               <a:ext uri="{FF2B5EF4-FFF2-40B4-BE49-F238E27FC236}">
-                <a16:creationId xmlns:a16="http://schemas.microsoft.com/office/drawing/2014/main" id="{761C935E-3502-4125-B23B-D963E5CF1A8B}"/>
+                <a16:creationId xmlns:a16="http://schemas.microsoft.com/office/drawing/2014/main" id="{950FA00C-51D5-4CF5-9D38-EC5ABC6A9746}"/>
               </a:ext>
             </a:extLst>
           </p:cNvPr>
@@ -3324,7 +3324,7 @@
           <p:cNvPr id="2" name="">
             <a:extLst xmlns:a="http://schemas.openxmlformats.org/drawingml/2006/main">
               <a:ext uri="{FF2B5EF4-FFF2-40B4-BE49-F238E27FC236}">
-                <a16:creationId xmlns:a16="http://schemas.microsoft.com/office/drawing/2014/main" id="{F0BE05B5-F088-45E9-BA24-E62D6F3E748A}"/>
+                <a16:creationId xmlns:a16="http://schemas.microsoft.com/office/drawing/2014/main" id="{8F365E3C-0CB6-4E0C-8D71-862E1E9E8FC0}"/>
               </a:ext>
             </a:extLst>
           </p:cNvPr>
@@ -3381,7 +3381,7 @@
           <p:cNvPr id="3" name="">
             <a:extLst xmlns:a="http://schemas.openxmlformats.org/drawingml/2006/main">
               <a:ext uri="{FF2B5EF4-FFF2-40B4-BE49-F238E27FC236}">
-                <a16:creationId xmlns:a16="http://schemas.microsoft.com/office/drawing/2014/main" id="{C08E4125-FCD5-4323-8FC7-0F0596D3CADB}"/>
+                <a16:creationId xmlns:a16="http://schemas.microsoft.com/office/drawing/2014/main" id="{3C307FB6-02D7-4627-89ED-9BAD9AF9D934}"/>
               </a:ext>
             </a:extLst>
           </p:cNvPr>
@@ -3413,7 +3413,7 @@
           <p:cNvPr id="4" name="">
             <a:extLst xmlns:a="http://schemas.openxmlformats.org/drawingml/2006/main">
               <a:ext uri="{FF2B5EF4-FFF2-40B4-BE49-F238E27FC236}">
-                <a16:creationId xmlns:a16="http://schemas.microsoft.com/office/drawing/2014/main" id="{B3FDD806-0AFB-44E8-A4F2-26875F9DE145}"/>
+                <a16:creationId xmlns:a16="http://schemas.microsoft.com/office/drawing/2014/main" id="{3293E65F-6A24-4DD6-9967-D6E99588716A}"/>
               </a:ext>
             </a:extLst>
           </p:cNvPr>
@@ -3470,7 +3470,7 @@
           <p:cNvPr id="5" name="">
             <a:extLst xmlns:a="http://schemas.openxmlformats.org/drawingml/2006/main">
               <a:ext uri="{FF2B5EF4-FFF2-40B4-BE49-F238E27FC236}">
-                <a16:creationId xmlns:a16="http://schemas.microsoft.com/office/drawing/2014/main" id="{920E07C1-4D67-462D-BC1B-D0BE21444266}"/>
+                <a16:creationId xmlns:a16="http://schemas.microsoft.com/office/drawing/2014/main" id="{1870B5A5-B5D1-4CB0-8353-20732DD85E68}"/>
               </a:ext>
             </a:extLst>
           </p:cNvPr>
@@ -3527,7 +3527,7 @@
           <p:cNvPr id="6" name="">
             <a:extLst xmlns:a="http://schemas.openxmlformats.org/drawingml/2006/main">
               <a:ext uri="{FF2B5EF4-FFF2-40B4-BE49-F238E27FC236}">
-                <a16:creationId xmlns:a16="http://schemas.microsoft.com/office/drawing/2014/main" id="{843D9701-3070-4A51-89BC-F47D491EC4C5}"/>
+                <a16:creationId xmlns:a16="http://schemas.microsoft.com/office/drawing/2014/main" id="{5D827816-BE84-499B-9C4A-B785F57F3BB1}"/>
               </a:ext>
             </a:extLst>
           </p:cNvPr>
@@ -3584,7 +3584,7 @@
           <p:cNvPr id="7" name="">
             <a:extLst xmlns:a="http://schemas.openxmlformats.org/drawingml/2006/main">
               <a:ext uri="{FF2B5EF4-FFF2-40B4-BE49-F238E27FC236}">
-                <a16:creationId xmlns:a16="http://schemas.microsoft.com/office/drawing/2014/main" id="{3B0F9DE9-D6C3-438A-A6F0-C5C45D2CDD63}"/>
+                <a16:creationId xmlns:a16="http://schemas.microsoft.com/office/drawing/2014/main" id="{3E8D0DE4-5C45-4EBB-9D8D-1914ECE80C86}"/>
               </a:ext>
             </a:extLst>
           </p:cNvPr>
@@ -3616,7 +3616,7 @@
           <p:cNvPr id="8" name="">
             <a:extLst xmlns:a="http://schemas.openxmlformats.org/drawingml/2006/main">
               <a:ext uri="{FF2B5EF4-FFF2-40B4-BE49-F238E27FC236}">
-                <a16:creationId xmlns:a16="http://schemas.microsoft.com/office/drawing/2014/main" id="{F4537FCD-CE6E-473A-9696-DF9657EF271F}"/>
+                <a16:creationId xmlns:a16="http://schemas.microsoft.com/office/drawing/2014/main" id="{727F3D3F-9051-41AA-8D9A-BB3AD7A2C287}"/>
               </a:ext>
             </a:extLst>
           </p:cNvPr>
@@ -3673,7 +3673,7 @@
           <p:cNvPr id="9" name="">
             <a:extLst xmlns:a="http://schemas.openxmlformats.org/drawingml/2006/main">
               <a:ext uri="{FF2B5EF4-FFF2-40B4-BE49-F238E27FC236}">
-                <a16:creationId xmlns:a16="http://schemas.microsoft.com/office/drawing/2014/main" id="{83798CC2-B30C-4600-9FD5-58B4F407FBDB}"/>
+                <a16:creationId xmlns:a16="http://schemas.microsoft.com/office/drawing/2014/main" id="{56310644-B5ED-46E5-A028-A5E26F6CB101}"/>
               </a:ext>
             </a:extLst>
           </p:cNvPr>
@@ -3730,7 +3730,7 @@
           <p:cNvPr id="10" name="">
             <a:extLst xmlns:a="http://schemas.openxmlformats.org/drawingml/2006/main">
               <a:ext uri="{FF2B5EF4-FFF2-40B4-BE49-F238E27FC236}">
-                <a16:creationId xmlns:a16="http://schemas.microsoft.com/office/drawing/2014/main" id="{8C101FC5-CB5D-402B-B959-713910C3F9B1}"/>
+                <a16:creationId xmlns:a16="http://schemas.microsoft.com/office/drawing/2014/main" id="{ED1FFB02-84DF-4228-B6DC-BB76F4B9D114}"/>
               </a:ext>
             </a:extLst>
           </p:cNvPr>
@@ -3787,7 +3787,7 @@
           <p:cNvPr id="11" name="">
             <a:extLst xmlns:a="http://schemas.openxmlformats.org/drawingml/2006/main">
               <a:ext uri="{FF2B5EF4-FFF2-40B4-BE49-F238E27FC236}">
-                <a16:creationId xmlns:a16="http://schemas.microsoft.com/office/drawing/2014/main" id="{9605E541-38B1-4C7C-A118-648BC7B662F1}"/>
+                <a16:creationId xmlns:a16="http://schemas.microsoft.com/office/drawing/2014/main" id="{A07EE64B-EC84-4610-BFE8-210AB54AD706}"/>
               </a:ext>
             </a:extLst>
           </p:cNvPr>
@@ -3821,7 +3821,7 @@
           <p:cNvPr id="12" name="">
             <a:extLst xmlns:a="http://schemas.openxmlformats.org/drawingml/2006/main">
               <a:ext uri="{FF2B5EF4-FFF2-40B4-BE49-F238E27FC236}">
-                <a16:creationId xmlns:a16="http://schemas.microsoft.com/office/drawing/2014/main" id="{E162714B-4DB9-43B0-98BD-6B41E5856250}"/>
+                <a16:creationId xmlns:a16="http://schemas.microsoft.com/office/drawing/2014/main" id="{BDBB9B92-852B-4A9C-84AE-C5E7B482EEAE}"/>
               </a:ext>
             </a:extLst>
           </p:cNvPr>
@@ -3878,7 +3878,7 @@
           <p:cNvPr id="13" name="">
             <a:extLst xmlns:a="http://schemas.openxmlformats.org/drawingml/2006/main">
               <a:ext uri="{FF2B5EF4-FFF2-40B4-BE49-F238E27FC236}">
-                <a16:creationId xmlns:a16="http://schemas.microsoft.com/office/drawing/2014/main" id="{99C3B323-E514-421B-A37B-CE30182AEAB8}"/>
+                <a16:creationId xmlns:a16="http://schemas.microsoft.com/office/drawing/2014/main" id="{46D77152-5EC7-44A4-9F6C-846487D873D4}"/>
               </a:ext>
             </a:extLst>
           </p:cNvPr>
@@ -3935,7 +3935,7 @@
           <p:cNvPr id="14" name="">
             <a:extLst xmlns:a="http://schemas.openxmlformats.org/drawingml/2006/main">
               <a:ext uri="{FF2B5EF4-FFF2-40B4-BE49-F238E27FC236}">
-                <a16:creationId xmlns:a16="http://schemas.microsoft.com/office/drawing/2014/main" id="{FC8334B7-3AF2-46F4-B467-FAD7470D7EDE}"/>
+                <a16:creationId xmlns:a16="http://schemas.microsoft.com/office/drawing/2014/main" id="{9E49954D-FACD-48B6-A15C-3FCB81F4EEE3}"/>
               </a:ext>
             </a:extLst>
           </p:cNvPr>
@@ -3992,7 +3992,7 @@
           <p:cNvPr id="15" name="">
             <a:extLst xmlns:a="http://schemas.openxmlformats.org/drawingml/2006/main">
               <a:ext uri="{FF2B5EF4-FFF2-40B4-BE49-F238E27FC236}">
-                <a16:creationId xmlns:a16="http://schemas.microsoft.com/office/drawing/2014/main" id="{FB609454-0B09-49C6-9735-2CDC77778719}"/>
+                <a16:creationId xmlns:a16="http://schemas.microsoft.com/office/drawing/2014/main" id="{55002632-A27C-49CC-A521-73CBCB50E4F6}"/>
               </a:ext>
             </a:extLst>
           </p:cNvPr>
@@ -4026,7 +4026,7 @@
           <p:cNvPr id="16" name="">
             <a:extLst xmlns:a="http://schemas.openxmlformats.org/drawingml/2006/main">
               <a:ext uri="{FF2B5EF4-FFF2-40B4-BE49-F238E27FC236}">
-                <a16:creationId xmlns:a16="http://schemas.microsoft.com/office/drawing/2014/main" id="{341F2280-8CCE-4096-9160-42E1A0E2A16B}"/>
+                <a16:creationId xmlns:a16="http://schemas.microsoft.com/office/drawing/2014/main" id="{B5D36C70-9BE3-4140-9B95-56C097308765}"/>
               </a:ext>
             </a:extLst>
           </p:cNvPr>
@@ -4083,7 +4083,7 @@
           <p:cNvPr id="17" name="">
             <a:extLst xmlns:a="http://schemas.openxmlformats.org/drawingml/2006/main">
               <a:ext uri="{FF2B5EF4-FFF2-40B4-BE49-F238E27FC236}">
-                <a16:creationId xmlns:a16="http://schemas.microsoft.com/office/drawing/2014/main" id="{A9B82473-69D1-4A93-ABAB-016F51AC69F3}"/>
+                <a16:creationId xmlns:a16="http://schemas.microsoft.com/office/drawing/2014/main" id="{65BC1377-DE61-4175-89B7-BC0F1E15B476}"/>
               </a:ext>
             </a:extLst>
           </p:cNvPr>
@@ -4140,7 +4140,7 @@
           <p:cNvPr id="18" name="">
             <a:extLst xmlns:a="http://schemas.openxmlformats.org/drawingml/2006/main">
               <a:ext uri="{FF2B5EF4-FFF2-40B4-BE49-F238E27FC236}">
-                <a16:creationId xmlns:a16="http://schemas.microsoft.com/office/drawing/2014/main" id="{1EF184D8-BB34-42CD-812F-D10F3C3AB0E7}"/>
+                <a16:creationId xmlns:a16="http://schemas.microsoft.com/office/drawing/2014/main" id="{84CAFEE5-9C78-49AC-BB88-0BE34ADE0C96}"/>
               </a:ext>
             </a:extLst>
           </p:cNvPr>
@@ -4195,7 +4195,7 @@
     </p:spTree>
     <p:extLst>
       <p:ext uri="{BB962C8B-B14F-4D97-AF65-F5344CB8AC3E}">
-        <p14:creationId xmlns:p14="http://schemas.microsoft.com/office/powerpoint/2010/main" val="2084801297"/>
+        <p14:creationId xmlns:p14="http://schemas.microsoft.com/office/powerpoint/2010/main" val="2080076450"/>
       </p:ext>
     </p:extLst>
   </p:cSld>
@@ -4350,7 +4350,7 @@
           <p:cNvPr id="23" name="">
             <a:extLst xmlns:a="http://schemas.openxmlformats.org/drawingml/2006/main">
               <a:ext uri="{FF2B5EF4-FFF2-40B4-BE49-F238E27FC236}">
-                <a16:creationId xmlns:a16="http://schemas.microsoft.com/office/drawing/2014/main" id="{33DE1D84-A0FD-428A-9765-73C4E428670A}"/>
+                <a16:creationId xmlns:a16="http://schemas.microsoft.com/office/drawing/2014/main" id="{1375A4AF-F664-4E3D-8F85-29F28F16FC13}"/>
               </a:ext>
             </a:extLst>
           </p:cNvPr>
@@ -4382,7 +4382,7 @@
           <p:cNvPr id="2" name="">
             <a:extLst xmlns:a="http://schemas.openxmlformats.org/drawingml/2006/main">
               <a:ext uri="{FF2B5EF4-FFF2-40B4-BE49-F238E27FC236}">
-                <a16:creationId xmlns:a16="http://schemas.microsoft.com/office/drawing/2014/main" id="{0879C3DF-CCA2-4E0D-A8B6-05A29929EE47}"/>
+                <a16:creationId xmlns:a16="http://schemas.microsoft.com/office/drawing/2014/main" id="{8FBBB7CA-1AEA-4B1B-BF61-58D3FD66A4FC}"/>
               </a:ext>
             </a:extLst>
           </p:cNvPr>
@@ -4439,7 +4439,7 @@
           <p:cNvPr id="3" name="">
             <a:extLst xmlns:a="http://schemas.openxmlformats.org/drawingml/2006/main">
               <a:ext uri="{FF2B5EF4-FFF2-40B4-BE49-F238E27FC236}">
-                <a16:creationId xmlns:a16="http://schemas.microsoft.com/office/drawing/2014/main" id="{7C669726-4F52-4178-BEF6-2F008D353ED6}"/>
+                <a16:creationId xmlns:a16="http://schemas.microsoft.com/office/drawing/2014/main" id="{B4FABD1A-7668-4A87-9387-B582DA17C81A}"/>
               </a:ext>
             </a:extLst>
           </p:cNvPr>
@@ -4471,7 +4471,7 @@
           <p:cNvPr id="4" name="">
             <a:extLst xmlns:a="http://schemas.openxmlformats.org/drawingml/2006/main">
               <a:ext uri="{FF2B5EF4-FFF2-40B4-BE49-F238E27FC236}">
-                <a16:creationId xmlns:a16="http://schemas.microsoft.com/office/drawing/2014/main" id="{47E90FC4-2A67-446C-80A8-FDECBBE2017A}"/>
+                <a16:creationId xmlns:a16="http://schemas.microsoft.com/office/drawing/2014/main" id="{7858AA40-40C7-48A6-B5E7-5943E3A8BC72}"/>
               </a:ext>
             </a:extLst>
           </p:cNvPr>
@@ -4528,7 +4528,7 @@
           <p:cNvPr id="5" name="">
             <a:extLst xmlns:a="http://schemas.openxmlformats.org/drawingml/2006/main">
               <a:ext uri="{FF2B5EF4-FFF2-40B4-BE49-F238E27FC236}">
-                <a16:creationId xmlns:a16="http://schemas.microsoft.com/office/drawing/2014/main" id="{CF88D153-53F0-48F5-B0C1-9E0248B3CCB3}"/>
+                <a16:creationId xmlns:a16="http://schemas.microsoft.com/office/drawing/2014/main" id="{4CE4C771-04F0-412B-B220-9ED450F38D03}"/>
               </a:ext>
             </a:extLst>
           </p:cNvPr>
@@ -4585,7 +4585,7 @@
           <p:cNvPr id="6" name="">
             <a:extLst xmlns:a="http://schemas.openxmlformats.org/drawingml/2006/main">
               <a:ext uri="{FF2B5EF4-FFF2-40B4-BE49-F238E27FC236}">
-                <a16:creationId xmlns:a16="http://schemas.microsoft.com/office/drawing/2014/main" id="{28F188A8-B27E-4CD1-8B86-E2933B7A5FD9}"/>
+                <a16:creationId xmlns:a16="http://schemas.microsoft.com/office/drawing/2014/main" id="{5DE8CD8F-BC59-46D1-94B0-9FB70D5C6863}"/>
               </a:ext>
             </a:extLst>
           </p:cNvPr>
@@ -4642,7 +4642,7 @@
           <p:cNvPr id="7" name="">
             <a:extLst xmlns:a="http://schemas.openxmlformats.org/drawingml/2006/main">
               <a:ext uri="{FF2B5EF4-FFF2-40B4-BE49-F238E27FC236}">
-                <a16:creationId xmlns:a16="http://schemas.microsoft.com/office/drawing/2014/main" id="{02AF5446-5D31-437D-832E-DB8AEE4A0ECB}"/>
+                <a16:creationId xmlns:a16="http://schemas.microsoft.com/office/drawing/2014/main" id="{E442CC64-6415-467D-B71A-A683ED5073CC}"/>
               </a:ext>
             </a:extLst>
           </p:cNvPr>
@@ -4674,7 +4674,7 @@
           <p:cNvPr id="8" name="">
             <a:extLst xmlns:a="http://schemas.openxmlformats.org/drawingml/2006/main">
               <a:ext uri="{FF2B5EF4-FFF2-40B4-BE49-F238E27FC236}">
-                <a16:creationId xmlns:a16="http://schemas.microsoft.com/office/drawing/2014/main" id="{758750B7-4468-4748-969C-A714A68F5E10}"/>
+                <a16:creationId xmlns:a16="http://schemas.microsoft.com/office/drawing/2014/main" id="{4F976E8D-E3D0-48F2-A74B-D83837CB5AC4}"/>
               </a:ext>
             </a:extLst>
           </p:cNvPr>
@@ -4731,7 +4731,7 @@
           <p:cNvPr id="9" name="">
             <a:extLst xmlns:a="http://schemas.openxmlformats.org/drawingml/2006/main">
               <a:ext uri="{FF2B5EF4-FFF2-40B4-BE49-F238E27FC236}">
-                <a16:creationId xmlns:a16="http://schemas.microsoft.com/office/drawing/2014/main" id="{60CBC67B-12C1-4F63-A400-7A3C49E25202}"/>
+                <a16:creationId xmlns:a16="http://schemas.microsoft.com/office/drawing/2014/main" id="{E0A3C74B-0AD3-42D8-B538-858DD0955ABC}"/>
               </a:ext>
             </a:extLst>
           </p:cNvPr>
@@ -4788,7 +4788,7 @@
           <p:cNvPr id="10" name="">
             <a:extLst xmlns:a="http://schemas.openxmlformats.org/drawingml/2006/main">
               <a:ext uri="{FF2B5EF4-FFF2-40B4-BE49-F238E27FC236}">
-                <a16:creationId xmlns:a16="http://schemas.microsoft.com/office/drawing/2014/main" id="{021019BC-501D-40CC-B077-325D35DA586F}"/>
+                <a16:creationId xmlns:a16="http://schemas.microsoft.com/office/drawing/2014/main" id="{9C84F47D-EFD0-4728-8734-AA01F02795DE}"/>
               </a:ext>
             </a:extLst>
           </p:cNvPr>
@@ -4822,7 +4822,7 @@
           <p:cNvPr id="11" name="">
             <a:extLst xmlns:a="http://schemas.openxmlformats.org/drawingml/2006/main">
               <a:ext uri="{FF2B5EF4-FFF2-40B4-BE49-F238E27FC236}">
-                <a16:creationId xmlns:a16="http://schemas.microsoft.com/office/drawing/2014/main" id="{B9369597-F87F-4461-A67D-B3F66027FCD8}"/>
+                <a16:creationId xmlns:a16="http://schemas.microsoft.com/office/drawing/2014/main" id="{46D688A3-D5FB-4525-9B7A-A59CCFFB913F}"/>
               </a:ext>
             </a:extLst>
           </p:cNvPr>
@@ -4854,7 +4854,7 @@
           <p:cNvPr id="12" name="">
             <a:extLst xmlns:a="http://schemas.openxmlformats.org/drawingml/2006/main">
               <a:ext uri="{FF2B5EF4-FFF2-40B4-BE49-F238E27FC236}">
-                <a16:creationId xmlns:a16="http://schemas.microsoft.com/office/drawing/2014/main" id="{A91B31CE-220D-47C2-B0F3-25A12ACCAD5D}"/>
+                <a16:creationId xmlns:a16="http://schemas.microsoft.com/office/drawing/2014/main" id="{682429FD-07EA-42D4-B816-EFA9F3C01BE0}"/>
               </a:ext>
             </a:extLst>
           </p:cNvPr>
@@ -4911,7 +4911,7 @@
           <p:cNvPr id="13" name="">
             <a:extLst xmlns:a="http://schemas.openxmlformats.org/drawingml/2006/main">
               <a:ext uri="{FF2B5EF4-FFF2-40B4-BE49-F238E27FC236}">
-                <a16:creationId xmlns:a16="http://schemas.microsoft.com/office/drawing/2014/main" id="{0E8C992F-1808-4481-84FC-AD948A6E2BE3}"/>
+                <a16:creationId xmlns:a16="http://schemas.microsoft.com/office/drawing/2014/main" id="{9939BB3C-7A15-41F5-9124-909FA2F6FAAE}"/>
               </a:ext>
             </a:extLst>
           </p:cNvPr>
@@ -4968,7 +4968,7 @@
           <p:cNvPr id="14" name="">
             <a:extLst xmlns:a="http://schemas.openxmlformats.org/drawingml/2006/main">
               <a:ext uri="{FF2B5EF4-FFF2-40B4-BE49-F238E27FC236}">
-                <a16:creationId xmlns:a16="http://schemas.microsoft.com/office/drawing/2014/main" id="{E9BCDD05-CC17-4FE0-BC49-307B8AAAE203}"/>
+                <a16:creationId xmlns:a16="http://schemas.microsoft.com/office/drawing/2014/main" id="{21CA181C-222C-4FAC-A794-3F04E6E0576E}"/>
               </a:ext>
             </a:extLst>
           </p:cNvPr>
@@ -5002,7 +5002,7 @@
           <p:cNvPr id="15" name="">
             <a:extLst xmlns:a="http://schemas.openxmlformats.org/drawingml/2006/main">
               <a:ext uri="{FF2B5EF4-FFF2-40B4-BE49-F238E27FC236}">
-                <a16:creationId xmlns:a16="http://schemas.microsoft.com/office/drawing/2014/main" id="{8A04805E-C190-4611-9F15-2A4AF44D81CA}"/>
+                <a16:creationId xmlns:a16="http://schemas.microsoft.com/office/drawing/2014/main" id="{89F7AE7F-BD65-4BF5-B6D1-6B3F327D9D81}"/>
               </a:ext>
             </a:extLst>
           </p:cNvPr>
@@ -5034,7 +5034,7 @@
           <p:cNvPr id="16" name="">
             <a:extLst xmlns:a="http://schemas.openxmlformats.org/drawingml/2006/main">
               <a:ext uri="{FF2B5EF4-FFF2-40B4-BE49-F238E27FC236}">
-                <a16:creationId xmlns:a16="http://schemas.microsoft.com/office/drawing/2014/main" id="{2403A0FE-B307-4DA2-86E6-6825AA4E4B84}"/>
+                <a16:creationId xmlns:a16="http://schemas.microsoft.com/office/drawing/2014/main" id="{2F6DCE50-A1D6-44B4-9FBC-17DBA15C50C5}"/>
               </a:ext>
             </a:extLst>
           </p:cNvPr>
@@ -5091,7 +5091,7 @@
           <p:cNvPr id="17" name="">
             <a:extLst xmlns:a="http://schemas.openxmlformats.org/drawingml/2006/main">
               <a:ext uri="{FF2B5EF4-FFF2-40B4-BE49-F238E27FC236}">
-                <a16:creationId xmlns:a16="http://schemas.microsoft.com/office/drawing/2014/main" id="{8EADD46D-845C-40EB-A867-F12B13E369E9}"/>
+                <a16:creationId xmlns:a16="http://schemas.microsoft.com/office/drawing/2014/main" id="{54B94AEF-35E6-4AE8-9542-C49BDA43C605}"/>
               </a:ext>
             </a:extLst>
           </p:cNvPr>
@@ -5148,7 +5148,7 @@
           <p:cNvPr id="18" name="">
             <a:extLst xmlns:a="http://schemas.openxmlformats.org/drawingml/2006/main">
               <a:ext uri="{FF2B5EF4-FFF2-40B4-BE49-F238E27FC236}">
-                <a16:creationId xmlns:a16="http://schemas.microsoft.com/office/drawing/2014/main" id="{214EC654-05DF-42CB-9335-F53D46850753}"/>
+                <a16:creationId xmlns:a16="http://schemas.microsoft.com/office/drawing/2014/main" id="{AB72C005-B0BE-4156-83F4-8965AE496BD4}"/>
               </a:ext>
             </a:extLst>
           </p:cNvPr>
@@ -5182,7 +5182,7 @@
           <p:cNvPr id="19" name="">
             <a:extLst xmlns:a="http://schemas.openxmlformats.org/drawingml/2006/main">
               <a:ext uri="{FF2B5EF4-FFF2-40B4-BE49-F238E27FC236}">
-                <a16:creationId xmlns:a16="http://schemas.microsoft.com/office/drawing/2014/main" id="{39B4E0B1-9C0A-47A1-9273-1DC5F34D7E13}"/>
+                <a16:creationId xmlns:a16="http://schemas.microsoft.com/office/drawing/2014/main" id="{B85D1C21-7388-469C-8C4B-954236106D12}"/>
               </a:ext>
             </a:extLst>
           </p:cNvPr>
@@ -5214,7 +5214,7 @@
           <p:cNvPr id="20" name="">
             <a:extLst xmlns:a="http://schemas.openxmlformats.org/drawingml/2006/main">
               <a:ext uri="{FF2B5EF4-FFF2-40B4-BE49-F238E27FC236}">
-                <a16:creationId xmlns:a16="http://schemas.microsoft.com/office/drawing/2014/main" id="{C5C959AF-D9B8-4683-9EB9-DEC1DEAA5936}"/>
+                <a16:creationId xmlns:a16="http://schemas.microsoft.com/office/drawing/2014/main" id="{CD3CB9F2-E87F-4722-B406-E7C986E5783B}"/>
               </a:ext>
             </a:extLst>
           </p:cNvPr>
@@ -5271,7 +5271,7 @@
           <p:cNvPr id="21" name="">
             <a:extLst xmlns:a="http://schemas.openxmlformats.org/drawingml/2006/main">
               <a:ext uri="{FF2B5EF4-FFF2-40B4-BE49-F238E27FC236}">
-                <a16:creationId xmlns:a16="http://schemas.microsoft.com/office/drawing/2014/main" id="{E3E84A19-95E7-4344-88C6-C1F15821CCAB}"/>
+                <a16:creationId xmlns:a16="http://schemas.microsoft.com/office/drawing/2014/main" id="{66CF0479-1EDD-496C-91E5-2F3A6982925B}"/>
               </a:ext>
             </a:extLst>
           </p:cNvPr>
@@ -5328,7 +5328,7 @@
           <p:cNvPr id="22" name="">
             <a:extLst xmlns:a="http://schemas.openxmlformats.org/drawingml/2006/main">
               <a:ext uri="{FF2B5EF4-FFF2-40B4-BE49-F238E27FC236}">
-                <a16:creationId xmlns:a16="http://schemas.microsoft.com/office/drawing/2014/main" id="{E416B1FC-CBED-4643-A9E1-59DBB1D1F9CE}"/>
+                <a16:creationId xmlns:a16="http://schemas.microsoft.com/office/drawing/2014/main" id="{586C9534-E7B4-42A5-8C2B-3CB674CCF94A}"/>
               </a:ext>
             </a:extLst>
           </p:cNvPr>
@@ -5383,7 +5383,7 @@
     </p:spTree>
     <p:extLst>
       <p:ext uri="{BB962C8B-B14F-4D97-AF65-F5344CB8AC3E}">
-        <p14:creationId xmlns:p14="http://schemas.microsoft.com/office/powerpoint/2010/main" val="635413667"/>
+        <p14:creationId xmlns:p14="http://schemas.microsoft.com/office/powerpoint/2010/main" val="940950941"/>
       </p:ext>
     </p:extLst>
   </p:cSld>
@@ -5584,7 +5584,7 @@
           <p:cNvPr id="23" name="">
             <a:extLst xmlns:a="http://schemas.openxmlformats.org/drawingml/2006/main">
               <a:ext uri="{FF2B5EF4-FFF2-40B4-BE49-F238E27FC236}">
-                <a16:creationId xmlns:a16="http://schemas.microsoft.com/office/drawing/2014/main" id="{DC69FD8A-F20E-4367-9D5E-2EF0C623BC98}"/>
+                <a16:creationId xmlns:a16="http://schemas.microsoft.com/office/drawing/2014/main" id="{102FB884-67F8-44F5-BC78-FF4FC4CECA70}"/>
               </a:ext>
             </a:extLst>
           </p:cNvPr>
@@ -5616,7 +5616,7 @@
           <p:cNvPr id="2" name="">
             <a:extLst xmlns:a="http://schemas.openxmlformats.org/drawingml/2006/main">
               <a:ext uri="{FF2B5EF4-FFF2-40B4-BE49-F238E27FC236}">
-                <a16:creationId xmlns:a16="http://schemas.microsoft.com/office/drawing/2014/main" id="{2F91E98B-899E-4873-A36E-C0B00AD02C23}"/>
+                <a16:creationId xmlns:a16="http://schemas.microsoft.com/office/drawing/2014/main" id="{75642600-A2CE-4E36-9080-1361143B903B}"/>
               </a:ext>
             </a:extLst>
           </p:cNvPr>
@@ -5673,7 +5673,7 @@
           <p:cNvPr id="3" name="">
             <a:extLst xmlns:a="http://schemas.openxmlformats.org/drawingml/2006/main">
               <a:ext uri="{FF2B5EF4-FFF2-40B4-BE49-F238E27FC236}">
-                <a16:creationId xmlns:a16="http://schemas.microsoft.com/office/drawing/2014/main" id="{A7C3D1E6-253D-4163-930D-35051AB0A003}"/>
+                <a16:creationId xmlns:a16="http://schemas.microsoft.com/office/drawing/2014/main" id="{EB656754-196E-46EC-BDC2-5C01B8B6E3DB}"/>
               </a:ext>
             </a:extLst>
           </p:cNvPr>
@@ -5705,7 +5705,7 @@
           <p:cNvPr id="4" name="">
             <a:extLst xmlns:a="http://schemas.openxmlformats.org/drawingml/2006/main">
               <a:ext uri="{FF2B5EF4-FFF2-40B4-BE49-F238E27FC236}">
-                <a16:creationId xmlns:a16="http://schemas.microsoft.com/office/drawing/2014/main" id="{435BB0E2-D370-4902-8413-5EFB3C2A9EA5}"/>
+                <a16:creationId xmlns:a16="http://schemas.microsoft.com/office/drawing/2014/main" id="{D55FF2BD-3859-4A80-B586-C7D9F1B3CB93}"/>
               </a:ext>
             </a:extLst>
           </p:cNvPr>
@@ -5762,7 +5762,7 @@
           <p:cNvPr id="5" name="">
             <a:extLst xmlns:a="http://schemas.openxmlformats.org/drawingml/2006/main">
               <a:ext uri="{FF2B5EF4-FFF2-40B4-BE49-F238E27FC236}">
-                <a16:creationId xmlns:a16="http://schemas.microsoft.com/office/drawing/2014/main" id="{0BDF6777-16EA-4992-AB40-77419B7875C1}"/>
+                <a16:creationId xmlns:a16="http://schemas.microsoft.com/office/drawing/2014/main" id="{F3656CF9-134A-43FA-868C-413E6879BF3B}"/>
               </a:ext>
             </a:extLst>
           </p:cNvPr>
@@ -5819,7 +5819,7 @@
           <p:cNvPr id="6" name="">
             <a:extLst xmlns:a="http://schemas.openxmlformats.org/drawingml/2006/main">
               <a:ext uri="{FF2B5EF4-FFF2-40B4-BE49-F238E27FC236}">
-                <a16:creationId xmlns:a16="http://schemas.microsoft.com/office/drawing/2014/main" id="{2524B5B6-00CB-445F-B2FA-62E7CD4C0428}"/>
+                <a16:creationId xmlns:a16="http://schemas.microsoft.com/office/drawing/2014/main" id="{28630923-EE04-4AFA-B542-980133A2AD70}"/>
               </a:ext>
             </a:extLst>
           </p:cNvPr>
@@ -5876,7 +5876,7 @@
           <p:cNvPr id="7" name="">
             <a:extLst xmlns:a="http://schemas.openxmlformats.org/drawingml/2006/main">
               <a:ext uri="{FF2B5EF4-FFF2-40B4-BE49-F238E27FC236}">
-                <a16:creationId xmlns:a16="http://schemas.microsoft.com/office/drawing/2014/main" id="{E3D0A372-8365-4737-97E6-58E7070E2048}"/>
+                <a16:creationId xmlns:a16="http://schemas.microsoft.com/office/drawing/2014/main" id="{B0E6D61C-6A03-45A6-8AC0-3B97FC5BEB9B}"/>
               </a:ext>
             </a:extLst>
           </p:cNvPr>
@@ -5908,7 +5908,7 @@
           <p:cNvPr id="8" name="">
             <a:extLst xmlns:a="http://schemas.openxmlformats.org/drawingml/2006/main">
               <a:ext uri="{FF2B5EF4-FFF2-40B4-BE49-F238E27FC236}">
-                <a16:creationId xmlns:a16="http://schemas.microsoft.com/office/drawing/2014/main" id="{E20F3A64-61AD-48A5-ABE0-BCDDDFF0A637}"/>
+                <a16:creationId xmlns:a16="http://schemas.microsoft.com/office/drawing/2014/main" id="{99C58D34-19C8-4121-BD42-EBC47E7C3A9E}"/>
               </a:ext>
             </a:extLst>
           </p:cNvPr>
@@ -5965,7 +5965,7 @@
           <p:cNvPr id="9" name="">
             <a:extLst xmlns:a="http://schemas.openxmlformats.org/drawingml/2006/main">
               <a:ext uri="{FF2B5EF4-FFF2-40B4-BE49-F238E27FC236}">
-                <a16:creationId xmlns:a16="http://schemas.microsoft.com/office/drawing/2014/main" id="{6692EEFB-6E8F-4412-9B9B-189999AE02DB}"/>
+                <a16:creationId xmlns:a16="http://schemas.microsoft.com/office/drawing/2014/main" id="{6F4D1A51-2CF8-4923-A1D1-5B1F04EF7789}"/>
               </a:ext>
             </a:extLst>
           </p:cNvPr>
@@ -6022,7 +6022,7 @@
           <p:cNvPr id="10" name="">
             <a:extLst xmlns:a="http://schemas.openxmlformats.org/drawingml/2006/main">
               <a:ext uri="{FF2B5EF4-FFF2-40B4-BE49-F238E27FC236}">
-                <a16:creationId xmlns:a16="http://schemas.microsoft.com/office/drawing/2014/main" id="{DE556240-3C8F-4B87-819D-00367FF97FAA}"/>
+                <a16:creationId xmlns:a16="http://schemas.microsoft.com/office/drawing/2014/main" id="{31E1EBB0-35BD-40DB-8D6D-3ED8AB8A9192}"/>
               </a:ext>
             </a:extLst>
           </p:cNvPr>
@@ -6056,7 +6056,7 @@
           <p:cNvPr id="11" name="">
             <a:extLst xmlns:a="http://schemas.openxmlformats.org/drawingml/2006/main">
               <a:ext uri="{FF2B5EF4-FFF2-40B4-BE49-F238E27FC236}">
-                <a16:creationId xmlns:a16="http://schemas.microsoft.com/office/drawing/2014/main" id="{CAF3DB6B-B9FF-44CD-98FA-B5A3B1986333}"/>
+                <a16:creationId xmlns:a16="http://schemas.microsoft.com/office/drawing/2014/main" id="{9AF3B9A2-0EB2-4AF9-AC64-6AA7611398A3}"/>
               </a:ext>
             </a:extLst>
           </p:cNvPr>
@@ -6088,7 +6088,7 @@
           <p:cNvPr id="12" name="">
             <a:extLst xmlns:a="http://schemas.openxmlformats.org/drawingml/2006/main">
               <a:ext uri="{FF2B5EF4-FFF2-40B4-BE49-F238E27FC236}">
-                <a16:creationId xmlns:a16="http://schemas.microsoft.com/office/drawing/2014/main" id="{81CF73E0-B8C6-43A0-87C5-477C8A2BD1D0}"/>
+                <a16:creationId xmlns:a16="http://schemas.microsoft.com/office/drawing/2014/main" id="{222D396A-4565-48B4-A90C-06FDEC5859FB}"/>
               </a:ext>
             </a:extLst>
           </p:cNvPr>
@@ -6145,7 +6145,7 @@
           <p:cNvPr id="13" name="">
             <a:extLst xmlns:a="http://schemas.openxmlformats.org/drawingml/2006/main">
               <a:ext uri="{FF2B5EF4-FFF2-40B4-BE49-F238E27FC236}">
-                <a16:creationId xmlns:a16="http://schemas.microsoft.com/office/drawing/2014/main" id="{9DC3E1E5-5613-4BB9-BE7B-BA8B8FFFE5D3}"/>
+                <a16:creationId xmlns:a16="http://schemas.microsoft.com/office/drawing/2014/main" id="{A1BE1DA6-0F6A-4B37-9974-3934D1B9292C}"/>
               </a:ext>
             </a:extLst>
           </p:cNvPr>
@@ -6202,7 +6202,7 @@
           <p:cNvPr id="14" name="">
             <a:extLst xmlns:a="http://schemas.openxmlformats.org/drawingml/2006/main">
               <a:ext uri="{FF2B5EF4-FFF2-40B4-BE49-F238E27FC236}">
-                <a16:creationId xmlns:a16="http://schemas.microsoft.com/office/drawing/2014/main" id="{CDC0CE38-6C15-4AEB-8CD0-0BB864D96593}"/>
+                <a16:creationId xmlns:a16="http://schemas.microsoft.com/office/drawing/2014/main" id="{A4615B73-DC9B-429F-BE1A-CFE3101BF1D0}"/>
               </a:ext>
             </a:extLst>
           </p:cNvPr>
@@ -6236,7 +6236,7 @@
           <p:cNvPr id="15" name="">
             <a:extLst xmlns:a="http://schemas.openxmlformats.org/drawingml/2006/main">
               <a:ext uri="{FF2B5EF4-FFF2-40B4-BE49-F238E27FC236}">
-                <a16:creationId xmlns:a16="http://schemas.microsoft.com/office/drawing/2014/main" id="{53AF94D4-6D9D-4109-949D-48C24EC790E6}"/>
+                <a16:creationId xmlns:a16="http://schemas.microsoft.com/office/drawing/2014/main" id="{DD3231EA-FD13-4770-8C50-C61D8A39AAB7}"/>
               </a:ext>
             </a:extLst>
           </p:cNvPr>
@@ -6268,7 +6268,7 @@
           <p:cNvPr id="16" name="">
             <a:extLst xmlns:a="http://schemas.openxmlformats.org/drawingml/2006/main">
               <a:ext uri="{FF2B5EF4-FFF2-40B4-BE49-F238E27FC236}">
-                <a16:creationId xmlns:a16="http://schemas.microsoft.com/office/drawing/2014/main" id="{BA82E6EE-61C0-4FC2-ADBF-428A32ADE6EC}"/>
+                <a16:creationId xmlns:a16="http://schemas.microsoft.com/office/drawing/2014/main" id="{D5A2988E-C483-4306-8288-EBD321B70639}"/>
               </a:ext>
             </a:extLst>
           </p:cNvPr>
@@ -6325,7 +6325,7 @@
           <p:cNvPr id="17" name="">
             <a:extLst xmlns:a="http://schemas.openxmlformats.org/drawingml/2006/main">
               <a:ext uri="{FF2B5EF4-FFF2-40B4-BE49-F238E27FC236}">
-                <a16:creationId xmlns:a16="http://schemas.microsoft.com/office/drawing/2014/main" id="{052C0EE6-D4AC-484E-B1ED-7FFF21EF9B40}"/>
+                <a16:creationId xmlns:a16="http://schemas.microsoft.com/office/drawing/2014/main" id="{D7C8AE0F-2450-4176-9618-DF789FEC58C1}"/>
               </a:ext>
             </a:extLst>
           </p:cNvPr>
@@ -6382,7 +6382,7 @@
           <p:cNvPr id="18" name="">
             <a:extLst xmlns:a="http://schemas.openxmlformats.org/drawingml/2006/main">
               <a:ext uri="{FF2B5EF4-FFF2-40B4-BE49-F238E27FC236}">
-                <a16:creationId xmlns:a16="http://schemas.microsoft.com/office/drawing/2014/main" id="{38309BD2-2669-4B0D-8E02-03727D931CD1}"/>
+                <a16:creationId xmlns:a16="http://schemas.microsoft.com/office/drawing/2014/main" id="{B3503DEF-D1D7-42B8-9AEE-EA6E3EB724F0}"/>
               </a:ext>
             </a:extLst>
           </p:cNvPr>
@@ -6416,7 +6416,7 @@
           <p:cNvPr id="19" name="">
             <a:extLst xmlns:a="http://schemas.openxmlformats.org/drawingml/2006/main">
               <a:ext uri="{FF2B5EF4-FFF2-40B4-BE49-F238E27FC236}">
-                <a16:creationId xmlns:a16="http://schemas.microsoft.com/office/drawing/2014/main" id="{1A9BAA2B-28A9-468D-A740-7F1BB7ADFD71}"/>
+                <a16:creationId xmlns:a16="http://schemas.microsoft.com/office/drawing/2014/main" id="{8D68DE57-AEAD-4853-9DEB-41B313A1C545}"/>
               </a:ext>
             </a:extLst>
           </p:cNvPr>
@@ -6448,7 +6448,7 @@
           <p:cNvPr id="20" name="">
             <a:extLst xmlns:a="http://schemas.openxmlformats.org/drawingml/2006/main">
               <a:ext uri="{FF2B5EF4-FFF2-40B4-BE49-F238E27FC236}">
-                <a16:creationId xmlns:a16="http://schemas.microsoft.com/office/drawing/2014/main" id="{A0D6A849-D829-45A7-9DB9-9158BEA955C2}"/>
+                <a16:creationId xmlns:a16="http://schemas.microsoft.com/office/drawing/2014/main" id="{98B8C487-0A09-432D-B7E6-43403FD0674B}"/>
               </a:ext>
             </a:extLst>
           </p:cNvPr>
@@ -6505,7 +6505,7 @@
           <p:cNvPr id="21" name="">
             <a:extLst xmlns:a="http://schemas.openxmlformats.org/drawingml/2006/main">
               <a:ext uri="{FF2B5EF4-FFF2-40B4-BE49-F238E27FC236}">
-                <a16:creationId xmlns:a16="http://schemas.microsoft.com/office/drawing/2014/main" id="{1D6F89D1-4DBF-4F23-853B-9E5CA156A9AE}"/>
+                <a16:creationId xmlns:a16="http://schemas.microsoft.com/office/drawing/2014/main" id="{6C5C7E9E-C624-4F08-BD81-79F6910E0F88}"/>
               </a:ext>
             </a:extLst>
           </p:cNvPr>
@@ -6562,7 +6562,7 @@
           <p:cNvPr id="22" name="">
             <a:extLst xmlns:a="http://schemas.openxmlformats.org/drawingml/2006/main">
               <a:ext uri="{FF2B5EF4-FFF2-40B4-BE49-F238E27FC236}">
-                <a16:creationId xmlns:a16="http://schemas.microsoft.com/office/drawing/2014/main" id="{1EFC8AA7-9C69-48C5-9329-A13BBBB483D5}"/>
+                <a16:creationId xmlns:a16="http://schemas.microsoft.com/office/drawing/2014/main" id="{E836ACC1-3529-4CCF-9889-6E85BEECB31B}"/>
               </a:ext>
             </a:extLst>
           </p:cNvPr>
@@ -6617,7 +6617,7 @@
     </p:spTree>
     <p:extLst>
       <p:ext uri="{BB962C8B-B14F-4D97-AF65-F5344CB8AC3E}">
-        <p14:creationId xmlns:p14="http://schemas.microsoft.com/office/powerpoint/2010/main" val="1606524505"/>
+        <p14:creationId xmlns:p14="http://schemas.microsoft.com/office/powerpoint/2010/main" val="1646327271"/>
       </p:ext>
     </p:extLst>
   </p:cSld>
@@ -6818,7 +6818,7 @@
           <p:cNvPr id="16" name="">
             <a:extLst xmlns:a="http://schemas.openxmlformats.org/drawingml/2006/main">
               <a:ext uri="{FF2B5EF4-FFF2-40B4-BE49-F238E27FC236}">
-                <a16:creationId xmlns:a16="http://schemas.microsoft.com/office/drawing/2014/main" id="{7B306B80-8FCF-4929-BC3F-AB931ED62343}"/>
+                <a16:creationId xmlns:a16="http://schemas.microsoft.com/office/drawing/2014/main" id="{E8A61CC8-78EF-4903-88A4-87FBD5EDE4D2}"/>
               </a:ext>
             </a:extLst>
           </p:cNvPr>
@@ -6850,7 +6850,7 @@
           <p:cNvPr id="2" name="">
             <a:extLst xmlns:a="http://schemas.openxmlformats.org/drawingml/2006/main">
               <a:ext uri="{FF2B5EF4-FFF2-40B4-BE49-F238E27FC236}">
-                <a16:creationId xmlns:a16="http://schemas.microsoft.com/office/drawing/2014/main" id="{B6C24FE9-A79F-4499-9BDB-7752F0389E07}"/>
+                <a16:creationId xmlns:a16="http://schemas.microsoft.com/office/drawing/2014/main" id="{F260EFFA-B08C-4B13-89DE-6C14EB65139F}"/>
               </a:ext>
             </a:extLst>
           </p:cNvPr>
@@ -6907,7 +6907,7 @@
           <p:cNvPr id="3" name="">
             <a:extLst xmlns:a="http://schemas.openxmlformats.org/drawingml/2006/main">
               <a:ext uri="{FF2B5EF4-FFF2-40B4-BE49-F238E27FC236}">
-                <a16:creationId xmlns:a16="http://schemas.microsoft.com/office/drawing/2014/main" id="{2CC9CCE6-72F1-4F46-9C18-B36D351EEDC4}"/>
+                <a16:creationId xmlns:a16="http://schemas.microsoft.com/office/drawing/2014/main" id="{7425262E-4427-404A-82D7-074ACF6A4146}"/>
               </a:ext>
             </a:extLst>
           </p:cNvPr>
@@ -6939,7 +6939,7 @@
           <p:cNvPr id="4" name="">
             <a:extLst xmlns:a="http://schemas.openxmlformats.org/drawingml/2006/main">
               <a:ext uri="{FF2B5EF4-FFF2-40B4-BE49-F238E27FC236}">
-                <a16:creationId xmlns:a16="http://schemas.microsoft.com/office/drawing/2014/main" id="{A117DDB3-7A8F-4009-845E-24265EFE0164}"/>
+                <a16:creationId xmlns:a16="http://schemas.microsoft.com/office/drawing/2014/main" id="{68E3CF29-620E-4449-BAE1-B8FEBDCB69FE}"/>
               </a:ext>
             </a:extLst>
           </p:cNvPr>
@@ -6996,7 +6996,7 @@
           <p:cNvPr id="5" name="">
             <a:extLst xmlns:a="http://schemas.openxmlformats.org/drawingml/2006/main">
               <a:ext uri="{FF2B5EF4-FFF2-40B4-BE49-F238E27FC236}">
-                <a16:creationId xmlns:a16="http://schemas.microsoft.com/office/drawing/2014/main" id="{A469F16A-24F9-4ADF-9710-ACF91C65BAE3}"/>
+                <a16:creationId xmlns:a16="http://schemas.microsoft.com/office/drawing/2014/main" id="{177C429D-383C-4D61-B522-BDF4D80835FB}"/>
               </a:ext>
             </a:extLst>
           </p:cNvPr>
@@ -7053,7 +7053,7 @@
           <p:cNvPr id="6" name="">
             <a:extLst xmlns:a="http://schemas.openxmlformats.org/drawingml/2006/main">
               <a:ext uri="{FF2B5EF4-FFF2-40B4-BE49-F238E27FC236}">
-                <a16:creationId xmlns:a16="http://schemas.microsoft.com/office/drawing/2014/main" id="{C0830397-1C78-44C1-BA5D-4815EEBD8B47}"/>
+                <a16:creationId xmlns:a16="http://schemas.microsoft.com/office/drawing/2014/main" id="{04D55E64-794B-4822-9598-52E5B247ACA4}"/>
               </a:ext>
             </a:extLst>
           </p:cNvPr>
@@ -7110,7 +7110,7 @@
           <p:cNvPr id="7" name="">
             <a:extLst xmlns:a="http://schemas.openxmlformats.org/drawingml/2006/main">
               <a:ext uri="{FF2B5EF4-FFF2-40B4-BE49-F238E27FC236}">
-                <a16:creationId xmlns:a16="http://schemas.microsoft.com/office/drawing/2014/main" id="{F0CEFFAC-661A-48C5-8091-95E12D51D236}"/>
+                <a16:creationId xmlns:a16="http://schemas.microsoft.com/office/drawing/2014/main" id="{8C98A886-A5B5-4409-B26A-4D4262FB845D}"/>
               </a:ext>
             </a:extLst>
           </p:cNvPr>
@@ -7142,7 +7142,7 @@
           <p:cNvPr id="8" name="">
             <a:extLst xmlns:a="http://schemas.openxmlformats.org/drawingml/2006/main">
               <a:ext uri="{FF2B5EF4-FFF2-40B4-BE49-F238E27FC236}">
-                <a16:creationId xmlns:a16="http://schemas.microsoft.com/office/drawing/2014/main" id="{FADD097F-D32B-42CE-B7A0-6757F2EB03BB}"/>
+                <a16:creationId xmlns:a16="http://schemas.microsoft.com/office/drawing/2014/main" id="{05A8F809-0FEA-4FC4-8958-33914D79B3E7}"/>
               </a:ext>
             </a:extLst>
           </p:cNvPr>
@@ -7199,7 +7199,7 @@
           <p:cNvPr id="9" name="">
             <a:extLst xmlns:a="http://schemas.openxmlformats.org/drawingml/2006/main">
               <a:ext uri="{FF2B5EF4-FFF2-40B4-BE49-F238E27FC236}">
-                <a16:creationId xmlns:a16="http://schemas.microsoft.com/office/drawing/2014/main" id="{9A2A8CBF-7736-4E0B-AB71-5FAB4ED6B25C}"/>
+                <a16:creationId xmlns:a16="http://schemas.microsoft.com/office/drawing/2014/main" id="{9CD37A68-F685-40E5-9264-2D54E9988521}"/>
               </a:ext>
             </a:extLst>
           </p:cNvPr>
@@ -7256,7 +7256,7 @@
           <p:cNvPr id="10" name="">
             <a:extLst xmlns:a="http://schemas.openxmlformats.org/drawingml/2006/main">
               <a:ext uri="{FF2B5EF4-FFF2-40B4-BE49-F238E27FC236}">
-                <a16:creationId xmlns:a16="http://schemas.microsoft.com/office/drawing/2014/main" id="{D96CAA95-5FB9-4E01-ADE3-6A84E60D55A9}"/>
+                <a16:creationId xmlns:a16="http://schemas.microsoft.com/office/drawing/2014/main" id="{8F899E63-466F-435F-95A9-3FF656B6DEB7}"/>
               </a:ext>
             </a:extLst>
           </p:cNvPr>
@@ -7313,7 +7313,7 @@
           <p:cNvPr id="11" name="">
             <a:extLst xmlns:a="http://schemas.openxmlformats.org/drawingml/2006/main">
               <a:ext uri="{FF2B5EF4-FFF2-40B4-BE49-F238E27FC236}">
-                <a16:creationId xmlns:a16="http://schemas.microsoft.com/office/drawing/2014/main" id="{610EA5DA-17C1-45BC-A3BF-A2AF913942B0}"/>
+                <a16:creationId xmlns:a16="http://schemas.microsoft.com/office/drawing/2014/main" id="{1A7CE784-14EB-4B42-92FA-DFBCFED0FD00}"/>
               </a:ext>
             </a:extLst>
           </p:cNvPr>
@@ -7345,7 +7345,7 @@
           <p:cNvPr id="12" name="">
             <a:extLst xmlns:a="http://schemas.openxmlformats.org/drawingml/2006/main">
               <a:ext uri="{FF2B5EF4-FFF2-40B4-BE49-F238E27FC236}">
-                <a16:creationId xmlns:a16="http://schemas.microsoft.com/office/drawing/2014/main" id="{EA14F570-4AE5-4D55-9BD9-3BE015035737}"/>
+                <a16:creationId xmlns:a16="http://schemas.microsoft.com/office/drawing/2014/main" id="{2D5C194B-90DD-4E8E-8EA6-82B8249472AF}"/>
               </a:ext>
             </a:extLst>
           </p:cNvPr>
@@ -7402,7 +7402,7 @@
           <p:cNvPr id="13" name="">
             <a:extLst xmlns:a="http://schemas.openxmlformats.org/drawingml/2006/main">
               <a:ext uri="{FF2B5EF4-FFF2-40B4-BE49-F238E27FC236}">
-                <a16:creationId xmlns:a16="http://schemas.microsoft.com/office/drawing/2014/main" id="{71793FBC-DCCC-4521-921C-5F3E64ED6133}"/>
+                <a16:creationId xmlns:a16="http://schemas.microsoft.com/office/drawing/2014/main" id="{29E41F0C-5E1D-4980-A325-B3EA47CD0051}"/>
               </a:ext>
             </a:extLst>
           </p:cNvPr>
@@ -7459,7 +7459,7 @@
           <p:cNvPr id="14" name="">
             <a:extLst xmlns:a="http://schemas.openxmlformats.org/drawingml/2006/main">
               <a:ext uri="{FF2B5EF4-FFF2-40B4-BE49-F238E27FC236}">
-                <a16:creationId xmlns:a16="http://schemas.microsoft.com/office/drawing/2014/main" id="{4931601C-7244-434F-A188-CF75606308D8}"/>
+                <a16:creationId xmlns:a16="http://schemas.microsoft.com/office/drawing/2014/main" id="{3F6F5E42-61F7-4972-A681-956D7D944F7B}"/>
               </a:ext>
             </a:extLst>
           </p:cNvPr>
@@ -7516,7 +7516,7 @@
           <p:cNvPr id="15" name="">
             <a:extLst xmlns:a="http://schemas.openxmlformats.org/drawingml/2006/main">
               <a:ext uri="{FF2B5EF4-FFF2-40B4-BE49-F238E27FC236}">
-                <a16:creationId xmlns:a16="http://schemas.microsoft.com/office/drawing/2014/main" id="{1121A973-499F-4586-94F7-12EBD6952AD2}"/>
+                <a16:creationId xmlns:a16="http://schemas.microsoft.com/office/drawing/2014/main" id="{9F3D6392-7BFF-42EA-A2E9-485F072468E4}"/>
               </a:ext>
             </a:extLst>
           </p:cNvPr>
@@ -7571,7 +7571,7 @@
     </p:spTree>
     <p:extLst>
       <p:ext uri="{BB962C8B-B14F-4D97-AF65-F5344CB8AC3E}">
-        <p14:creationId xmlns:p14="http://schemas.microsoft.com/office/powerpoint/2010/main" val="1677586598"/>
+        <p14:creationId xmlns:p14="http://schemas.microsoft.com/office/powerpoint/2010/main" val="1394551626"/>
       </p:ext>
     </p:extLst>
   </p:cSld>
@@ -7772,7 +7772,7 @@
           <p:cNvPr id="23" name="">
             <a:extLst xmlns:a="http://schemas.openxmlformats.org/drawingml/2006/main">
               <a:ext uri="{FF2B5EF4-FFF2-40B4-BE49-F238E27FC236}">
-                <a16:creationId xmlns:a16="http://schemas.microsoft.com/office/drawing/2014/main" id="{076719C4-7357-484E-9C86-FABDD274DC11}"/>
+                <a16:creationId xmlns:a16="http://schemas.microsoft.com/office/drawing/2014/main" id="{8627B87A-9381-47B5-9204-CAC7DD961AFA}"/>
               </a:ext>
             </a:extLst>
           </p:cNvPr>
@@ -7804,7 +7804,7 @@
           <p:cNvPr id="2" name="">
             <a:extLst xmlns:a="http://schemas.openxmlformats.org/drawingml/2006/main">
               <a:ext uri="{FF2B5EF4-FFF2-40B4-BE49-F238E27FC236}">
-                <a16:creationId xmlns:a16="http://schemas.microsoft.com/office/drawing/2014/main" id="{5A3F5431-C602-4A9B-86E4-47DF3F71ED1F}"/>
+                <a16:creationId xmlns:a16="http://schemas.microsoft.com/office/drawing/2014/main" id="{3E36F9EE-B26D-48BF-9FD4-B2D6F3DF7BD8}"/>
               </a:ext>
             </a:extLst>
           </p:cNvPr>
@@ -7861,7 +7861,7 @@
           <p:cNvPr id="3" name="">
             <a:extLst xmlns:a="http://schemas.openxmlformats.org/drawingml/2006/main">
               <a:ext uri="{FF2B5EF4-FFF2-40B4-BE49-F238E27FC236}">
-                <a16:creationId xmlns:a16="http://schemas.microsoft.com/office/drawing/2014/main" id="{32387669-5217-4734-BB6C-6E055299E42A}"/>
+                <a16:creationId xmlns:a16="http://schemas.microsoft.com/office/drawing/2014/main" id="{D53C8D2D-D242-4B83-99DF-2BBB21FC30A6}"/>
               </a:ext>
             </a:extLst>
           </p:cNvPr>
@@ -7893,7 +7893,7 @@
           <p:cNvPr id="4" name="">
             <a:extLst xmlns:a="http://schemas.openxmlformats.org/drawingml/2006/main">
               <a:ext uri="{FF2B5EF4-FFF2-40B4-BE49-F238E27FC236}">
-                <a16:creationId xmlns:a16="http://schemas.microsoft.com/office/drawing/2014/main" id="{EFBD72BD-9292-49EC-A1E8-0482101CB10D}"/>
+                <a16:creationId xmlns:a16="http://schemas.microsoft.com/office/drawing/2014/main" id="{15A4BDB7-96E5-4583-805B-B5CA947F396D}"/>
               </a:ext>
             </a:extLst>
           </p:cNvPr>
@@ -7950,7 +7950,7 @@
           <p:cNvPr id="5" name="">
             <a:extLst xmlns:a="http://schemas.openxmlformats.org/drawingml/2006/main">
               <a:ext uri="{FF2B5EF4-FFF2-40B4-BE49-F238E27FC236}">
-                <a16:creationId xmlns:a16="http://schemas.microsoft.com/office/drawing/2014/main" id="{609F28E9-7ED5-42C1-BC03-A33A418BD79C}"/>
+                <a16:creationId xmlns:a16="http://schemas.microsoft.com/office/drawing/2014/main" id="{9F64CAF0-FFDC-4BD0-A156-D89BCC1A3AEA}"/>
               </a:ext>
             </a:extLst>
           </p:cNvPr>
@@ -8007,7 +8007,7 @@
           <p:cNvPr id="6" name="">
             <a:extLst xmlns:a="http://schemas.openxmlformats.org/drawingml/2006/main">
               <a:ext uri="{FF2B5EF4-FFF2-40B4-BE49-F238E27FC236}">
-                <a16:creationId xmlns:a16="http://schemas.microsoft.com/office/drawing/2014/main" id="{7BA68E21-4C1B-4B47-9D4D-54C6E029B769}"/>
+                <a16:creationId xmlns:a16="http://schemas.microsoft.com/office/drawing/2014/main" id="{C1E80AB1-E257-423A-BED7-69818A5CBFC3}"/>
               </a:ext>
             </a:extLst>
           </p:cNvPr>
@@ -8064,7 +8064,7 @@
           <p:cNvPr id="7" name="">
             <a:extLst xmlns:a="http://schemas.openxmlformats.org/drawingml/2006/main">
               <a:ext uri="{FF2B5EF4-FFF2-40B4-BE49-F238E27FC236}">
-                <a16:creationId xmlns:a16="http://schemas.microsoft.com/office/drawing/2014/main" id="{71B7BBDD-252B-4DE7-994D-9A93939B41C7}"/>
+                <a16:creationId xmlns:a16="http://schemas.microsoft.com/office/drawing/2014/main" id="{FA3720BA-7829-4D9A-807E-B91FCBE88B06}"/>
               </a:ext>
             </a:extLst>
           </p:cNvPr>
@@ -8096,7 +8096,7 @@
           <p:cNvPr id="8" name="">
             <a:extLst xmlns:a="http://schemas.openxmlformats.org/drawingml/2006/main">
               <a:ext uri="{FF2B5EF4-FFF2-40B4-BE49-F238E27FC236}">
-                <a16:creationId xmlns:a16="http://schemas.microsoft.com/office/drawing/2014/main" id="{5C2E7CA8-D761-4124-B3F2-0DEB3C9304E8}"/>
+                <a16:creationId xmlns:a16="http://schemas.microsoft.com/office/drawing/2014/main" id="{E7F21465-314E-44CB-A87B-6539088FB76C}"/>
               </a:ext>
             </a:extLst>
           </p:cNvPr>
@@ -8153,7 +8153,7 @@
           <p:cNvPr id="9" name="">
             <a:extLst xmlns:a="http://schemas.openxmlformats.org/drawingml/2006/main">
               <a:ext uri="{FF2B5EF4-FFF2-40B4-BE49-F238E27FC236}">
-                <a16:creationId xmlns:a16="http://schemas.microsoft.com/office/drawing/2014/main" id="{B8A714E1-363E-43B6-BD3B-417A70609474}"/>
+                <a16:creationId xmlns:a16="http://schemas.microsoft.com/office/drawing/2014/main" id="{F7B3ED0A-4422-4AC5-8C22-986809E7A609}"/>
               </a:ext>
             </a:extLst>
           </p:cNvPr>
@@ -8210,19 +8210,19 @@
           <p:cNvPr id="10" name="">
             <a:extLst xmlns:a="http://schemas.openxmlformats.org/drawingml/2006/main">
               <a:ext uri="{FF2B5EF4-FFF2-40B4-BE49-F238E27FC236}">
-                <a16:creationId xmlns:a16="http://schemas.microsoft.com/office/drawing/2014/main" id="{FDBBEE5F-8B13-4D5C-A470-0B1314703EFC}"/>
-              </a:ext>
-            </a:extLst>
-          </p:cNvPr>
-          <p:cNvSpPr>
-            <a:spLocks xmlns:a="http://schemas.openxmlformats.org/drawingml/2006/main" noGrp="1"/>
-          </p:cNvSpPr>
-          <p:nvPr/>
-        </p:nvSpPr>
-        <p:spPr>
-          <a:xfrm xmlns:a="http://schemas.openxmlformats.org/drawingml/2006/main">
-            <a:off x="914400" y="1257300"/>
-            <a:ext cx="10363200" cy="781050"/>
+                <a16:creationId xmlns:a16="http://schemas.microsoft.com/office/drawing/2014/main" id="{AF1DB537-0419-4DD3-9282-231504F31628}"/>
+              </a:ext>
+            </a:extLst>
+          </p:cNvPr>
+          <p:cNvSpPr>
+            <a:spLocks xmlns:a="http://schemas.openxmlformats.org/drawingml/2006/main" noGrp="1"/>
+          </p:cNvSpPr>
+          <p:nvPr/>
+        </p:nvSpPr>
+        <p:spPr>
+          <a:xfrm xmlns:a="http://schemas.openxmlformats.org/drawingml/2006/main">
+            <a:off x="857250" y="1219200"/>
+            <a:ext cx="10477500" cy="742950"/>
           </a:xfrm>
           <a:prstGeom xmlns:a="http://schemas.openxmlformats.org/drawingml/2006/main" prst="rect">
             <a:avLst/>
@@ -8239,7 +8239,7 @@
           <a:lstStyle xmlns:a="http://schemas.openxmlformats.org/drawingml/2006/main"/>
           <a:p xmlns:a="http://schemas.openxmlformats.org/drawingml/2006/main">
             <a:pPr algn="ctr">
-              <a:defRPr sz="2175" b="1">
+              <a:defRPr sz="2100" b="1">
                 <a:solidFill>
                   <a:srgbClr val="17253A"/>
                 </a:solidFill>
@@ -8249,7 +8249,7 @@
               </a:defRPr>
             </a:pPr>
             <a:r>
-              <a:rPr sz="2175" b="1">
+              <a:rPr sz="2100" b="1">
                 <a:solidFill>
                   <a:srgbClr val="17253A"/>
                 </a:solidFill>
@@ -8267,28 +8267,30 @@
           <p:cNvPr id="11" name="">
             <a:extLst xmlns:a="http://schemas.openxmlformats.org/drawingml/2006/main">
               <a:ext uri="{FF2B5EF4-FFF2-40B4-BE49-F238E27FC236}">
-                <a16:creationId xmlns:a16="http://schemas.microsoft.com/office/drawing/2014/main" id="{95D95D4B-1405-498E-8FC9-37C0D3F6F6D9}"/>
-              </a:ext>
-            </a:extLst>
-          </p:cNvPr>
-          <p:cNvSpPr>
-            <a:spLocks xmlns:a="http://schemas.openxmlformats.org/drawingml/2006/main" noGrp="1"/>
-          </p:cNvSpPr>
-          <p:nvPr/>
-        </p:nvSpPr>
-        <p:spPr>
-          <a:xfrm xmlns:a="http://schemas.openxmlformats.org/drawingml/2006/main">
-            <a:off x="1000125" y="2247900"/>
-            <a:ext cx="476250" cy="476250"/>
-          </a:xfrm>
-          <a:prstGeom xmlns:a="http://schemas.openxmlformats.org/drawingml/2006/main" prst="ellipse">
+                <a16:creationId xmlns:a16="http://schemas.microsoft.com/office/drawing/2014/main" id="{A473BA35-DF0A-42F4-BD82-20BC240CB850}"/>
+              </a:ext>
+            </a:extLst>
+          </p:cNvPr>
+          <p:cNvSpPr>
+            <a:spLocks xmlns:a="http://schemas.openxmlformats.org/drawingml/2006/main" noGrp="1"/>
+          </p:cNvSpPr>
+          <p:nvPr/>
+        </p:nvSpPr>
+        <p:spPr>
+          <a:xfrm xmlns:a="http://schemas.openxmlformats.org/drawingml/2006/main">
+            <a:off x="971550" y="2124075"/>
+            <a:ext cx="38100" cy="3524250"/>
+          </a:xfrm>
+          <a:prstGeom xmlns:a="http://schemas.openxmlformats.org/drawingml/2006/main" prst="rect">
             <a:avLst/>
           </a:prstGeom>
           <a:solidFill xmlns:a="http://schemas.openxmlformats.org/drawingml/2006/main">
-            <a:srgbClr val="18324A"/>
+            <a:srgbClr val="2C6E73"/>
           </a:solidFill>
           <a:ln xmlns:a="http://schemas.openxmlformats.org/drawingml/2006/main" w="0">
-            <a:noFill/>
+            <a:solidFill>
+              <a:srgbClr val="2C6E73"/>
+            </a:solidFill>
           </a:ln>
         </p:spPr>
       </p:sp>
@@ -8297,19 +8299,19 @@
           <p:cNvPr id="12" name="">
             <a:extLst xmlns:a="http://schemas.openxmlformats.org/drawingml/2006/main">
               <a:ext uri="{FF2B5EF4-FFF2-40B4-BE49-F238E27FC236}">
-                <a16:creationId xmlns:a16="http://schemas.microsoft.com/office/drawing/2014/main" id="{0568019D-9ABA-44D9-B3D0-F64EF39AAF59}"/>
-              </a:ext>
-            </a:extLst>
-          </p:cNvPr>
-          <p:cNvSpPr>
-            <a:spLocks xmlns:a="http://schemas.openxmlformats.org/drawingml/2006/main" noGrp="1"/>
-          </p:cNvSpPr>
-          <p:nvPr/>
-        </p:nvSpPr>
-        <p:spPr>
-          <a:xfrm xmlns:a="http://schemas.openxmlformats.org/drawingml/2006/main">
-            <a:off x="1000125" y="2276475"/>
-            <a:ext cx="476250" cy="419100"/>
+                <a16:creationId xmlns:a16="http://schemas.microsoft.com/office/drawing/2014/main" id="{4128B9AD-D530-491D-B82F-63115C7F1FC6}"/>
+              </a:ext>
+            </a:extLst>
+          </p:cNvPr>
+          <p:cNvSpPr>
+            <a:spLocks xmlns:a="http://schemas.openxmlformats.org/drawingml/2006/main" noGrp="1"/>
+          </p:cNvSpPr>
+          <p:nvPr/>
+        </p:nvSpPr>
+        <p:spPr>
+          <a:xfrm xmlns:a="http://schemas.openxmlformats.org/drawingml/2006/main">
+            <a:off x="1162050" y="2200275"/>
+            <a:ext cx="400050" cy="400050"/>
           </a:xfrm>
           <a:prstGeom xmlns:a="http://schemas.openxmlformats.org/drawingml/2006/main" prst="rect">
             <a:avLst/>
@@ -8326,9 +8328,9 @@
           <a:lstStyle xmlns:a="http://schemas.openxmlformats.org/drawingml/2006/main"/>
           <a:p xmlns:a="http://schemas.openxmlformats.org/drawingml/2006/main">
             <a:pPr algn="ctr">
-              <a:defRPr sz="1350" b="1">
-                <a:solidFill>
-                  <a:srgbClr val="FFFFFF"/>
+              <a:defRPr sz="1125" b="1">
+                <a:solidFill>
+                  <a:srgbClr val="2C6E73"/>
                 </a:solidFill>
                 <a:latin typeface="Arial"/>
                 <a:ea typeface="Arial"/>
@@ -8336,9 +8338,9 @@
               </a:defRPr>
             </a:pPr>
             <a:r>
-              <a:rPr sz="1350" b="1">
-                <a:solidFill>
-                  <a:srgbClr val="FFFFFF"/>
+              <a:rPr sz="1125" b="1">
+                <a:solidFill>
+                  <a:srgbClr val="2C6E73"/>
                 </a:solidFill>
                 <a:latin typeface="Arial"/>
                 <a:ea typeface="Arial"/>
@@ -8354,19 +8356,19 @@
           <p:cNvPr id="13" name="">
             <a:extLst xmlns:a="http://schemas.openxmlformats.org/drawingml/2006/main">
               <a:ext uri="{FF2B5EF4-FFF2-40B4-BE49-F238E27FC236}">
-                <a16:creationId xmlns:a16="http://schemas.microsoft.com/office/drawing/2014/main" id="{98D8F25A-245E-4D22-827C-49A50095B1D9}"/>
-              </a:ext>
-            </a:extLst>
-          </p:cNvPr>
-          <p:cNvSpPr>
-            <a:spLocks xmlns:a="http://schemas.openxmlformats.org/drawingml/2006/main" noGrp="1"/>
-          </p:cNvSpPr>
-          <p:nvPr/>
-        </p:nvSpPr>
-        <p:spPr>
-          <a:xfrm xmlns:a="http://schemas.openxmlformats.org/drawingml/2006/main">
-            <a:off x="1714500" y="2181225"/>
-            <a:ext cx="9429750" cy="609600"/>
+                <a16:creationId xmlns:a16="http://schemas.microsoft.com/office/drawing/2014/main" id="{C1172097-2B85-4DD4-AFBD-D564D5F5D21C}"/>
+              </a:ext>
+            </a:extLst>
+          </p:cNvPr>
+          <p:cNvSpPr>
+            <a:spLocks xmlns:a="http://schemas.openxmlformats.org/drawingml/2006/main" noGrp="1"/>
+          </p:cNvSpPr>
+          <p:nvPr/>
+        </p:nvSpPr>
+        <p:spPr>
+          <a:xfrm xmlns:a="http://schemas.openxmlformats.org/drawingml/2006/main">
+            <a:off x="1714500" y="2114550"/>
+            <a:ext cx="9525000" cy="809625"/>
           </a:xfrm>
           <a:prstGeom xmlns:a="http://schemas.openxmlformats.org/drawingml/2006/main" prst="rect">
             <a:avLst/>
@@ -8383,7 +8385,7 @@
           <a:lstStyle xmlns:a="http://schemas.openxmlformats.org/drawingml/2006/main"/>
           <a:p xmlns:a="http://schemas.openxmlformats.org/drawingml/2006/main">
             <a:pPr algn="l">
-              <a:defRPr sz="1500" b="0">
+              <a:defRPr sz="1725" b="0">
                 <a:solidFill>
                   <a:srgbClr val="17253A"/>
                 </a:solidFill>
@@ -8393,7 +8395,7 @@
               </a:defRPr>
             </a:pPr>
             <a:r>
-              <a:rPr sz="1500" b="0">
+              <a:rPr sz="1725" b="0">
                 <a:solidFill>
                   <a:srgbClr val="17253A"/>
                 </a:solidFill>
@@ -8401,7 +8403,7 @@
                 <a:ea typeface="Arial"/>
                 <a:cs typeface="Arial"/>
               </a:rPr>
-              <a:t>Identify the structure: Identify the three perpendicular dimensions in one unit.</a:t>
+              <a:t>Cuboid A: 8 × 6 × 5 = 240 cm³</a:t>
             </a:r>
           </a:p>
         </p:txBody>
@@ -8411,28 +8413,30 @@
           <p:cNvPr id="14" name="">
             <a:extLst xmlns:a="http://schemas.openxmlformats.org/drawingml/2006/main">
               <a:ext uri="{FF2B5EF4-FFF2-40B4-BE49-F238E27FC236}">
-                <a16:creationId xmlns:a16="http://schemas.microsoft.com/office/drawing/2014/main" id="{EF59ADB9-7EAE-4013-8529-08CA2AD1C445}"/>
-              </a:ext>
-            </a:extLst>
-          </p:cNvPr>
-          <p:cNvSpPr>
-            <a:spLocks xmlns:a="http://schemas.openxmlformats.org/drawingml/2006/main" noGrp="1"/>
-          </p:cNvSpPr>
-          <p:nvPr/>
-        </p:nvSpPr>
-        <p:spPr>
-          <a:xfrm xmlns:a="http://schemas.openxmlformats.org/drawingml/2006/main">
-            <a:off x="1000125" y="2990850"/>
-            <a:ext cx="476250" cy="476250"/>
-          </a:xfrm>
-          <a:prstGeom xmlns:a="http://schemas.openxmlformats.org/drawingml/2006/main" prst="ellipse">
+                <a16:creationId xmlns:a16="http://schemas.microsoft.com/office/drawing/2014/main" id="{98333F9A-3D6F-4C69-8D0F-7BBEFF0893AB}"/>
+              </a:ext>
+            </a:extLst>
+          </p:cNvPr>
+          <p:cNvSpPr>
+            <a:spLocks xmlns:a="http://schemas.openxmlformats.org/drawingml/2006/main" noGrp="1"/>
+          </p:cNvSpPr>
+          <p:nvPr/>
+        </p:nvSpPr>
+        <p:spPr>
+          <a:xfrm xmlns:a="http://schemas.openxmlformats.org/drawingml/2006/main">
+            <a:off x="1714500" y="2943225"/>
+            <a:ext cx="9334500" cy="9525"/>
+          </a:xfrm>
+          <a:prstGeom xmlns:a="http://schemas.openxmlformats.org/drawingml/2006/main" prst="rect">
             <a:avLst/>
           </a:prstGeom>
           <a:solidFill xmlns:a="http://schemas.openxmlformats.org/drawingml/2006/main">
-            <a:srgbClr val="2C6E73"/>
+            <a:srgbClr val="D9E0E6"/>
           </a:solidFill>
           <a:ln xmlns:a="http://schemas.openxmlformats.org/drawingml/2006/main" w="0">
-            <a:noFill/>
+            <a:solidFill>
+              <a:srgbClr val="D9E0E6"/>
+            </a:solidFill>
           </a:ln>
         </p:spPr>
       </p:sp>
@@ -8441,19 +8445,19 @@
           <p:cNvPr id="15" name="">
             <a:extLst xmlns:a="http://schemas.openxmlformats.org/drawingml/2006/main">
               <a:ext uri="{FF2B5EF4-FFF2-40B4-BE49-F238E27FC236}">
-                <a16:creationId xmlns:a16="http://schemas.microsoft.com/office/drawing/2014/main" id="{5C610988-7BB1-4C3B-8F82-95D7CB42DAC4}"/>
-              </a:ext>
-            </a:extLst>
-          </p:cNvPr>
-          <p:cNvSpPr>
-            <a:spLocks xmlns:a="http://schemas.openxmlformats.org/drawingml/2006/main" noGrp="1"/>
-          </p:cNvSpPr>
-          <p:nvPr/>
-        </p:nvSpPr>
-        <p:spPr>
-          <a:xfrm xmlns:a="http://schemas.openxmlformats.org/drawingml/2006/main">
-            <a:off x="1000125" y="3019425"/>
-            <a:ext cx="476250" cy="419100"/>
+                <a16:creationId xmlns:a16="http://schemas.microsoft.com/office/drawing/2014/main" id="{6EA16C1B-1FE7-40DE-96AA-C1854123D392}"/>
+              </a:ext>
+            </a:extLst>
+          </p:cNvPr>
+          <p:cNvSpPr>
+            <a:spLocks xmlns:a="http://schemas.openxmlformats.org/drawingml/2006/main" noGrp="1"/>
+          </p:cNvSpPr>
+          <p:nvPr/>
+        </p:nvSpPr>
+        <p:spPr>
+          <a:xfrm xmlns:a="http://schemas.openxmlformats.org/drawingml/2006/main">
+            <a:off x="1162050" y="3076575"/>
+            <a:ext cx="400050" cy="400050"/>
           </a:xfrm>
           <a:prstGeom xmlns:a="http://schemas.openxmlformats.org/drawingml/2006/main" prst="rect">
             <a:avLst/>
@@ -8470,9 +8474,9 @@
           <a:lstStyle xmlns:a="http://schemas.openxmlformats.org/drawingml/2006/main"/>
           <a:p xmlns:a="http://schemas.openxmlformats.org/drawingml/2006/main">
             <a:pPr algn="ctr">
-              <a:defRPr sz="1350" b="1">
-                <a:solidFill>
-                  <a:srgbClr val="FFFFFF"/>
+              <a:defRPr sz="1125" b="1">
+                <a:solidFill>
+                  <a:srgbClr val="2C6E73"/>
                 </a:solidFill>
                 <a:latin typeface="Arial"/>
                 <a:ea typeface="Arial"/>
@@ -8480,9 +8484,9 @@
               </a:defRPr>
             </a:pPr>
             <a:r>
-              <a:rPr sz="1350" b="1">
-                <a:solidFill>
-                  <a:srgbClr val="FFFFFF"/>
+              <a:rPr sz="1125" b="1">
+                <a:solidFill>
+                  <a:srgbClr val="2C6E73"/>
                 </a:solidFill>
                 <a:latin typeface="Arial"/>
                 <a:ea typeface="Arial"/>
@@ -8498,19 +8502,19 @@
           <p:cNvPr id="16" name="">
             <a:extLst xmlns:a="http://schemas.openxmlformats.org/drawingml/2006/main">
               <a:ext uri="{FF2B5EF4-FFF2-40B4-BE49-F238E27FC236}">
-                <a16:creationId xmlns:a16="http://schemas.microsoft.com/office/drawing/2014/main" id="{7FD4FB6A-95FB-43C1-8D05-6EF0D51F34C2}"/>
-              </a:ext>
-            </a:extLst>
-          </p:cNvPr>
-          <p:cNvSpPr>
-            <a:spLocks xmlns:a="http://schemas.openxmlformats.org/drawingml/2006/main" noGrp="1"/>
-          </p:cNvSpPr>
-          <p:nvPr/>
-        </p:nvSpPr>
-        <p:spPr>
-          <a:xfrm xmlns:a="http://schemas.openxmlformats.org/drawingml/2006/main">
-            <a:off x="1714500" y="2924175"/>
-            <a:ext cx="9429750" cy="609600"/>
+                <a16:creationId xmlns:a16="http://schemas.microsoft.com/office/drawing/2014/main" id="{720FB0DD-59F4-47E8-B5A8-34CB503B30F8}"/>
+              </a:ext>
+            </a:extLst>
+          </p:cNvPr>
+          <p:cNvSpPr>
+            <a:spLocks xmlns:a="http://schemas.openxmlformats.org/drawingml/2006/main" noGrp="1"/>
+          </p:cNvSpPr>
+          <p:nvPr/>
+        </p:nvSpPr>
+        <p:spPr>
+          <a:xfrm xmlns:a="http://schemas.openxmlformats.org/drawingml/2006/main">
+            <a:off x="1714500" y="2990850"/>
+            <a:ext cx="9525000" cy="809625"/>
           </a:xfrm>
           <a:prstGeom xmlns:a="http://schemas.openxmlformats.org/drawingml/2006/main" prst="rect">
             <a:avLst/>
@@ -8527,7 +8531,7 @@
           <a:lstStyle xmlns:a="http://schemas.openxmlformats.org/drawingml/2006/main"/>
           <a:p xmlns:a="http://schemas.openxmlformats.org/drawingml/2006/main">
             <a:pPr algn="l">
-              <a:defRPr sz="1500" b="0">
+              <a:defRPr sz="1725" b="0">
                 <a:solidFill>
                   <a:srgbClr val="17253A"/>
                 </a:solidFill>
@@ -8537,7 +8541,7 @@
               </a:defRPr>
             </a:pPr>
             <a:r>
-              <a:rPr sz="1500" b="0">
+              <a:rPr sz="1725" b="0">
                 <a:solidFill>
                   <a:srgbClr val="17253A"/>
                 </a:solidFill>
@@ -8545,7 +8549,7 @@
                 <a:ea typeface="Arial"/>
                 <a:cs typeface="Arial"/>
               </a:rPr>
-              <a:t>Set up the method: Multiply length by width by height.</a:t>
+              <a:t>Cuboid B: 10 × 6 × 4 = 240 cm³</a:t>
             </a:r>
           </a:p>
         </p:txBody>
@@ -8555,28 +8559,30 @@
           <p:cNvPr id="17" name="">
             <a:extLst xmlns:a="http://schemas.openxmlformats.org/drawingml/2006/main">
               <a:ext uri="{FF2B5EF4-FFF2-40B4-BE49-F238E27FC236}">
-                <a16:creationId xmlns:a16="http://schemas.microsoft.com/office/drawing/2014/main" id="{93FFFDB1-0275-4294-A5D5-1B7002F279D5}"/>
-              </a:ext>
-            </a:extLst>
-          </p:cNvPr>
-          <p:cNvSpPr>
-            <a:spLocks xmlns:a="http://schemas.openxmlformats.org/drawingml/2006/main" noGrp="1"/>
-          </p:cNvSpPr>
-          <p:nvPr/>
-        </p:nvSpPr>
-        <p:spPr>
-          <a:xfrm xmlns:a="http://schemas.openxmlformats.org/drawingml/2006/main">
-            <a:off x="1000125" y="3733800"/>
-            <a:ext cx="476250" cy="476250"/>
-          </a:xfrm>
-          <a:prstGeom xmlns:a="http://schemas.openxmlformats.org/drawingml/2006/main" prst="ellipse">
+                <a16:creationId xmlns:a16="http://schemas.microsoft.com/office/drawing/2014/main" id="{2B53A73D-F722-4F4F-A492-D52DFE807F3D}"/>
+              </a:ext>
+            </a:extLst>
+          </p:cNvPr>
+          <p:cNvSpPr>
+            <a:spLocks xmlns:a="http://schemas.openxmlformats.org/drawingml/2006/main" noGrp="1"/>
+          </p:cNvSpPr>
+          <p:nvPr/>
+        </p:nvSpPr>
+        <p:spPr>
+          <a:xfrm xmlns:a="http://schemas.openxmlformats.org/drawingml/2006/main">
+            <a:off x="1714500" y="3819525"/>
+            <a:ext cx="9334500" cy="9525"/>
+          </a:xfrm>
+          <a:prstGeom xmlns:a="http://schemas.openxmlformats.org/drawingml/2006/main" prst="rect">
             <a:avLst/>
           </a:prstGeom>
           <a:solidFill xmlns:a="http://schemas.openxmlformats.org/drawingml/2006/main">
-            <a:srgbClr val="2C6E73"/>
+            <a:srgbClr val="D9E0E6"/>
           </a:solidFill>
           <a:ln xmlns:a="http://schemas.openxmlformats.org/drawingml/2006/main" w="0">
-            <a:noFill/>
+            <a:solidFill>
+              <a:srgbClr val="D9E0E6"/>
+            </a:solidFill>
           </a:ln>
         </p:spPr>
       </p:sp>
@@ -8585,19 +8591,19 @@
           <p:cNvPr id="18" name="">
             <a:extLst xmlns:a="http://schemas.openxmlformats.org/drawingml/2006/main">
               <a:ext uri="{FF2B5EF4-FFF2-40B4-BE49-F238E27FC236}">
-                <a16:creationId xmlns:a16="http://schemas.microsoft.com/office/drawing/2014/main" id="{7C4EE74F-CB55-4BA4-851B-39B5CD8EDAFF}"/>
-              </a:ext>
-            </a:extLst>
-          </p:cNvPr>
-          <p:cNvSpPr>
-            <a:spLocks xmlns:a="http://schemas.openxmlformats.org/drawingml/2006/main" noGrp="1"/>
-          </p:cNvSpPr>
-          <p:nvPr/>
-        </p:nvSpPr>
-        <p:spPr>
-          <a:xfrm xmlns:a="http://schemas.openxmlformats.org/drawingml/2006/main">
-            <a:off x="1000125" y="3762375"/>
-            <a:ext cx="476250" cy="419100"/>
+                <a16:creationId xmlns:a16="http://schemas.microsoft.com/office/drawing/2014/main" id="{A06A5584-A062-4AB6-A49D-0A222BD7ED30}"/>
+              </a:ext>
+            </a:extLst>
+          </p:cNvPr>
+          <p:cNvSpPr>
+            <a:spLocks xmlns:a="http://schemas.openxmlformats.org/drawingml/2006/main" noGrp="1"/>
+          </p:cNvSpPr>
+          <p:nvPr/>
+        </p:nvSpPr>
+        <p:spPr>
+          <a:xfrm xmlns:a="http://schemas.openxmlformats.org/drawingml/2006/main">
+            <a:off x="1162050" y="3952875"/>
+            <a:ext cx="400050" cy="400050"/>
           </a:xfrm>
           <a:prstGeom xmlns:a="http://schemas.openxmlformats.org/drawingml/2006/main" prst="rect">
             <a:avLst/>
@@ -8614,9 +8620,9 @@
           <a:lstStyle xmlns:a="http://schemas.openxmlformats.org/drawingml/2006/main"/>
           <a:p xmlns:a="http://schemas.openxmlformats.org/drawingml/2006/main">
             <a:pPr algn="ctr">
-              <a:defRPr sz="1350" b="1">
-                <a:solidFill>
-                  <a:srgbClr val="FFFFFF"/>
+              <a:defRPr sz="1125" b="1">
+                <a:solidFill>
+                  <a:srgbClr val="2C6E73"/>
                 </a:solidFill>
                 <a:latin typeface="Arial"/>
                 <a:ea typeface="Arial"/>
@@ -8624,9 +8630,9 @@
               </a:defRPr>
             </a:pPr>
             <a:r>
-              <a:rPr sz="1350" b="1">
-                <a:solidFill>
-                  <a:srgbClr val="FFFFFF"/>
+              <a:rPr sz="1125" b="1">
+                <a:solidFill>
+                  <a:srgbClr val="2C6E73"/>
                 </a:solidFill>
                 <a:latin typeface="Arial"/>
                 <a:ea typeface="Arial"/>
@@ -8642,19 +8648,19 @@
           <p:cNvPr id="19" name="">
             <a:extLst xmlns:a="http://schemas.openxmlformats.org/drawingml/2006/main">
               <a:ext uri="{FF2B5EF4-FFF2-40B4-BE49-F238E27FC236}">
-                <a16:creationId xmlns:a16="http://schemas.microsoft.com/office/drawing/2014/main" id="{F3E5D407-4B88-4919-90F5-F1151F854A50}"/>
-              </a:ext>
-            </a:extLst>
-          </p:cNvPr>
-          <p:cNvSpPr>
-            <a:spLocks xmlns:a="http://schemas.openxmlformats.org/drawingml/2006/main" noGrp="1"/>
-          </p:cNvSpPr>
-          <p:nvPr/>
-        </p:nvSpPr>
-        <p:spPr>
-          <a:xfrm xmlns:a="http://schemas.openxmlformats.org/drawingml/2006/main">
-            <a:off x="1714500" y="3667125"/>
-            <a:ext cx="9429750" cy="609600"/>
+                <a16:creationId xmlns:a16="http://schemas.microsoft.com/office/drawing/2014/main" id="{EB523F5A-59AB-4740-AAC6-086C08B9F6DA}"/>
+              </a:ext>
+            </a:extLst>
+          </p:cNvPr>
+          <p:cNvSpPr>
+            <a:spLocks xmlns:a="http://schemas.openxmlformats.org/drawingml/2006/main" noGrp="1"/>
+          </p:cNvSpPr>
+          <p:nvPr/>
+        </p:nvSpPr>
+        <p:spPr>
+          <a:xfrm xmlns:a="http://schemas.openxmlformats.org/drawingml/2006/main">
+            <a:off x="1714500" y="3867150"/>
+            <a:ext cx="9525000" cy="809625"/>
           </a:xfrm>
           <a:prstGeom xmlns:a="http://schemas.openxmlformats.org/drawingml/2006/main" prst="rect">
             <a:avLst/>
@@ -8671,7 +8677,7 @@
           <a:lstStyle xmlns:a="http://schemas.openxmlformats.org/drawingml/2006/main"/>
           <a:p xmlns:a="http://schemas.openxmlformats.org/drawingml/2006/main">
             <a:pPr algn="l">
-              <a:defRPr sz="1500" b="0">
+              <a:defRPr sz="1725" b="0">
                 <a:solidFill>
                   <a:srgbClr val="17253A"/>
                 </a:solidFill>
@@ -8681,7 +8687,7 @@
               </a:defRPr>
             </a:pPr>
             <a:r>
-              <a:rPr sz="1500" b="0">
+              <a:rPr sz="1725" b="0">
                 <a:solidFill>
                   <a:srgbClr val="17253A"/>
                 </a:solidFill>
@@ -8689,7 +8695,7 @@
                 <a:ea typeface="Arial"/>
                 <a:cs typeface="Arial"/>
               </a:rPr>
-              <a:t>Complete the calculation: Both are 240 cm3.</a:t>
+              <a:t>240 cm³ = 240 cm³</a:t>
             </a:r>
           </a:p>
         </p:txBody>
@@ -8699,28 +8705,30 @@
           <p:cNvPr id="20" name="">
             <a:extLst xmlns:a="http://schemas.openxmlformats.org/drawingml/2006/main">
               <a:ext uri="{FF2B5EF4-FFF2-40B4-BE49-F238E27FC236}">
-                <a16:creationId xmlns:a16="http://schemas.microsoft.com/office/drawing/2014/main" id="{436DB904-A5D2-4A1C-8236-ACB96AD5844E}"/>
-              </a:ext>
-            </a:extLst>
-          </p:cNvPr>
-          <p:cNvSpPr>
-            <a:spLocks xmlns:a="http://schemas.openxmlformats.org/drawingml/2006/main" noGrp="1"/>
-          </p:cNvSpPr>
-          <p:nvPr/>
-        </p:nvSpPr>
-        <p:spPr>
-          <a:xfrm xmlns:a="http://schemas.openxmlformats.org/drawingml/2006/main">
-            <a:off x="1000125" y="4476750"/>
-            <a:ext cx="476250" cy="476250"/>
-          </a:xfrm>
-          <a:prstGeom xmlns:a="http://schemas.openxmlformats.org/drawingml/2006/main" prst="ellipse">
+                <a16:creationId xmlns:a16="http://schemas.microsoft.com/office/drawing/2014/main" id="{8B1BBF73-7256-4933-A510-9427660D470C}"/>
+              </a:ext>
+            </a:extLst>
+          </p:cNvPr>
+          <p:cNvSpPr>
+            <a:spLocks xmlns:a="http://schemas.openxmlformats.org/drawingml/2006/main" noGrp="1"/>
+          </p:cNvSpPr>
+          <p:nvPr/>
+        </p:nvSpPr>
+        <p:spPr>
+          <a:xfrm xmlns:a="http://schemas.openxmlformats.org/drawingml/2006/main">
+            <a:off x="1714500" y="4695825"/>
+            <a:ext cx="9334500" cy="9525"/>
+          </a:xfrm>
+          <a:prstGeom xmlns:a="http://schemas.openxmlformats.org/drawingml/2006/main" prst="rect">
             <a:avLst/>
           </a:prstGeom>
           <a:solidFill xmlns:a="http://schemas.openxmlformats.org/drawingml/2006/main">
-            <a:srgbClr val="2C6E73"/>
+            <a:srgbClr val="D9E0E6"/>
           </a:solidFill>
           <a:ln xmlns:a="http://schemas.openxmlformats.org/drawingml/2006/main" w="0">
-            <a:noFill/>
+            <a:solidFill>
+              <a:srgbClr val="D9E0E6"/>
+            </a:solidFill>
           </a:ln>
         </p:spPr>
       </p:sp>
@@ -8729,19 +8737,19 @@
           <p:cNvPr id="21" name="">
             <a:extLst xmlns:a="http://schemas.openxmlformats.org/drawingml/2006/main">
               <a:ext uri="{FF2B5EF4-FFF2-40B4-BE49-F238E27FC236}">
-                <a16:creationId xmlns:a16="http://schemas.microsoft.com/office/drawing/2014/main" id="{77720D4F-7F90-4413-9B91-0553D5C196E4}"/>
-              </a:ext>
-            </a:extLst>
-          </p:cNvPr>
-          <p:cNvSpPr>
-            <a:spLocks xmlns:a="http://schemas.openxmlformats.org/drawingml/2006/main" noGrp="1"/>
-          </p:cNvSpPr>
-          <p:nvPr/>
-        </p:nvSpPr>
-        <p:spPr>
-          <a:xfrm xmlns:a="http://schemas.openxmlformats.org/drawingml/2006/main">
-            <a:off x="1000125" y="4505325"/>
-            <a:ext cx="476250" cy="419100"/>
+                <a16:creationId xmlns:a16="http://schemas.microsoft.com/office/drawing/2014/main" id="{7B9D3F40-D823-41CD-A739-B3893C4AD5F5}"/>
+              </a:ext>
+            </a:extLst>
+          </p:cNvPr>
+          <p:cNvSpPr>
+            <a:spLocks xmlns:a="http://schemas.openxmlformats.org/drawingml/2006/main" noGrp="1"/>
+          </p:cNvSpPr>
+          <p:nvPr/>
+        </p:nvSpPr>
+        <p:spPr>
+          <a:xfrm xmlns:a="http://schemas.openxmlformats.org/drawingml/2006/main">
+            <a:off x="1162050" y="4829175"/>
+            <a:ext cx="400050" cy="400050"/>
           </a:xfrm>
           <a:prstGeom xmlns:a="http://schemas.openxmlformats.org/drawingml/2006/main" prst="rect">
             <a:avLst/>
@@ -8758,9 +8766,9 @@
           <a:lstStyle xmlns:a="http://schemas.openxmlformats.org/drawingml/2006/main"/>
           <a:p xmlns:a="http://schemas.openxmlformats.org/drawingml/2006/main">
             <a:pPr algn="ctr">
-              <a:defRPr sz="1350" b="1">
-                <a:solidFill>
-                  <a:srgbClr val="FFFFFF"/>
+              <a:defRPr sz="1125" b="1">
+                <a:solidFill>
+                  <a:srgbClr val="2F785D"/>
                 </a:solidFill>
                 <a:latin typeface="Arial"/>
                 <a:ea typeface="Arial"/>
@@ -8768,9 +8776,9 @@
               </a:defRPr>
             </a:pPr>
             <a:r>
-              <a:rPr sz="1350" b="1">
-                <a:solidFill>
-                  <a:srgbClr val="FFFFFF"/>
+              <a:rPr sz="1125" b="1">
+                <a:solidFill>
+                  <a:srgbClr val="2F785D"/>
                 </a:solidFill>
                 <a:latin typeface="Arial"/>
                 <a:ea typeface="Arial"/>
@@ -8786,19 +8794,19 @@
           <p:cNvPr id="22" name="">
             <a:extLst xmlns:a="http://schemas.openxmlformats.org/drawingml/2006/main">
               <a:ext uri="{FF2B5EF4-FFF2-40B4-BE49-F238E27FC236}">
-                <a16:creationId xmlns:a16="http://schemas.microsoft.com/office/drawing/2014/main" id="{5BEE2845-88B1-4688-93BF-CAA7EE9D9EB5}"/>
-              </a:ext>
-            </a:extLst>
-          </p:cNvPr>
-          <p:cNvSpPr>
-            <a:spLocks xmlns:a="http://schemas.openxmlformats.org/drawingml/2006/main" noGrp="1"/>
-          </p:cNvSpPr>
-          <p:nvPr/>
-        </p:nvSpPr>
-        <p:spPr>
-          <a:xfrm xmlns:a="http://schemas.openxmlformats.org/drawingml/2006/main">
-            <a:off x="1714500" y="4410075"/>
-            <a:ext cx="9429750" cy="609600"/>
+                <a16:creationId xmlns:a16="http://schemas.microsoft.com/office/drawing/2014/main" id="{C316C78A-054A-446B-80EB-8CD424D794A2}"/>
+              </a:ext>
+            </a:extLst>
+          </p:cNvPr>
+          <p:cNvSpPr>
+            <a:spLocks xmlns:a="http://schemas.openxmlformats.org/drawingml/2006/main" noGrp="1"/>
+          </p:cNvSpPr>
+          <p:nvPr/>
+        </p:nvSpPr>
+        <p:spPr>
+          <a:xfrm xmlns:a="http://schemas.openxmlformats.org/drawingml/2006/main">
+            <a:off x="1714500" y="4743450"/>
+            <a:ext cx="9525000" cy="809625"/>
           </a:xfrm>
           <a:prstGeom xmlns:a="http://schemas.openxmlformats.org/drawingml/2006/main" prst="rect">
             <a:avLst/>
@@ -8815,7 +8823,7 @@
           <a:lstStyle xmlns:a="http://schemas.openxmlformats.org/drawingml/2006/main"/>
           <a:p xmlns:a="http://schemas.openxmlformats.org/drawingml/2006/main">
             <a:pPr algn="l">
-              <a:defRPr sz="1500" b="1">
+              <a:defRPr sz="1725" b="1">
                 <a:solidFill>
                   <a:srgbClr val="2F785D"/>
                 </a:solidFill>
@@ -8825,7 +8833,7 @@
               </a:defRPr>
             </a:pPr>
             <a:r>
-              <a:rPr sz="1500" b="1">
+              <a:rPr sz="1725" b="1">
                 <a:solidFill>
                   <a:srgbClr val="2F785D"/>
                 </a:solidFill>
@@ -8833,7 +8841,7 @@
                 <a:ea typeface="Arial"/>
                 <a:cs typeface="Arial"/>
               </a:rPr>
-              <a:t>Check the result: Use cubic units and compare the result with an estimate.</a:t>
+              <a:t>Both cuboids have equal volume</a:t>
             </a:r>
           </a:p>
         </p:txBody>
@@ -8841,7 +8849,7 @@
     </p:spTree>
     <p:extLst>
       <p:ext uri="{BB962C8B-B14F-4D97-AF65-F5344CB8AC3E}">
-        <p14:creationId xmlns:p14="http://schemas.microsoft.com/office/powerpoint/2010/main" val="147391849"/>
+        <p14:creationId xmlns:p14="http://schemas.microsoft.com/office/powerpoint/2010/main" val="1573712857"/>
       </p:ext>
     </p:extLst>
   </p:cSld>
@@ -9134,7 +9142,7 @@
           <p:cNvPr id="15" name="">
             <a:extLst xmlns:a="http://schemas.openxmlformats.org/drawingml/2006/main">
               <a:ext uri="{FF2B5EF4-FFF2-40B4-BE49-F238E27FC236}">
-                <a16:creationId xmlns:a16="http://schemas.microsoft.com/office/drawing/2014/main" id="{73219764-A37D-4A6D-A006-CFF199BBF950}"/>
+                <a16:creationId xmlns:a16="http://schemas.microsoft.com/office/drawing/2014/main" id="{A2B9EC42-AEBA-40C0-99E7-FF0AE6F4EF25}"/>
               </a:ext>
             </a:extLst>
           </p:cNvPr>
@@ -9166,7 +9174,7 @@
           <p:cNvPr id="2" name="">
             <a:extLst xmlns:a="http://schemas.openxmlformats.org/drawingml/2006/main">
               <a:ext uri="{FF2B5EF4-FFF2-40B4-BE49-F238E27FC236}">
-                <a16:creationId xmlns:a16="http://schemas.microsoft.com/office/drawing/2014/main" id="{FF1C20CA-B615-4975-A495-DF14F383ADEF}"/>
+                <a16:creationId xmlns:a16="http://schemas.microsoft.com/office/drawing/2014/main" id="{9E15A85A-89AE-4D09-A4F3-B2349B38962B}"/>
               </a:ext>
             </a:extLst>
           </p:cNvPr>
@@ -9223,7 +9231,7 @@
           <p:cNvPr id="3" name="">
             <a:extLst xmlns:a="http://schemas.openxmlformats.org/drawingml/2006/main">
               <a:ext uri="{FF2B5EF4-FFF2-40B4-BE49-F238E27FC236}">
-                <a16:creationId xmlns:a16="http://schemas.microsoft.com/office/drawing/2014/main" id="{214013A1-2D43-450C-B330-C2F8B4CD02CF}"/>
+                <a16:creationId xmlns:a16="http://schemas.microsoft.com/office/drawing/2014/main" id="{B50D138B-A64F-40D4-9414-AA53204BCF57}"/>
               </a:ext>
             </a:extLst>
           </p:cNvPr>
@@ -9255,7 +9263,7 @@
           <p:cNvPr id="4" name="">
             <a:extLst xmlns:a="http://schemas.openxmlformats.org/drawingml/2006/main">
               <a:ext uri="{FF2B5EF4-FFF2-40B4-BE49-F238E27FC236}">
-                <a16:creationId xmlns:a16="http://schemas.microsoft.com/office/drawing/2014/main" id="{39F85D6F-3F0F-4945-9F81-0520FF351437}"/>
+                <a16:creationId xmlns:a16="http://schemas.microsoft.com/office/drawing/2014/main" id="{D08DE771-41A6-4949-9039-58A2BB7428C3}"/>
               </a:ext>
             </a:extLst>
           </p:cNvPr>
@@ -9312,7 +9320,7 @@
           <p:cNvPr id="5" name="">
             <a:extLst xmlns:a="http://schemas.openxmlformats.org/drawingml/2006/main">
               <a:ext uri="{FF2B5EF4-FFF2-40B4-BE49-F238E27FC236}">
-                <a16:creationId xmlns:a16="http://schemas.microsoft.com/office/drawing/2014/main" id="{323EBEC5-96E0-4AF8-A89A-BA89CECCA3EC}"/>
+                <a16:creationId xmlns:a16="http://schemas.microsoft.com/office/drawing/2014/main" id="{182DD12C-4D17-49B7-B92B-1E106C450AA3}"/>
               </a:ext>
             </a:extLst>
           </p:cNvPr>
@@ -9369,7 +9377,7 @@
           <p:cNvPr id="6" name="">
             <a:extLst xmlns:a="http://schemas.openxmlformats.org/drawingml/2006/main">
               <a:ext uri="{FF2B5EF4-FFF2-40B4-BE49-F238E27FC236}">
-                <a16:creationId xmlns:a16="http://schemas.microsoft.com/office/drawing/2014/main" id="{9862E379-7E7F-4EE3-B654-B8D9B054DA12}"/>
+                <a16:creationId xmlns:a16="http://schemas.microsoft.com/office/drawing/2014/main" id="{8587C32B-C933-4757-A297-A322FE55E495}"/>
               </a:ext>
             </a:extLst>
           </p:cNvPr>
@@ -9426,7 +9434,7 @@
           <p:cNvPr id="7" name="">
             <a:extLst xmlns:a="http://schemas.openxmlformats.org/drawingml/2006/main">
               <a:ext uri="{FF2B5EF4-FFF2-40B4-BE49-F238E27FC236}">
-                <a16:creationId xmlns:a16="http://schemas.microsoft.com/office/drawing/2014/main" id="{65A3EE40-C416-4DD2-9D3C-58A474A0BBB8}"/>
+                <a16:creationId xmlns:a16="http://schemas.microsoft.com/office/drawing/2014/main" id="{0BB6C636-84E7-486A-BFD9-7150338E84D1}"/>
               </a:ext>
             </a:extLst>
           </p:cNvPr>
@@ -9458,7 +9466,7 @@
           <p:cNvPr id="8" name="">
             <a:extLst xmlns:a="http://schemas.openxmlformats.org/drawingml/2006/main">
               <a:ext uri="{FF2B5EF4-FFF2-40B4-BE49-F238E27FC236}">
-                <a16:creationId xmlns:a16="http://schemas.microsoft.com/office/drawing/2014/main" id="{A3B1F9B4-0AD0-41D9-8094-5C4DE635CD0A}"/>
+                <a16:creationId xmlns:a16="http://schemas.microsoft.com/office/drawing/2014/main" id="{1F6EB75B-1120-4B54-B39D-9972F3494246}"/>
               </a:ext>
             </a:extLst>
           </p:cNvPr>
@@ -9515,7 +9523,7 @@
           <p:cNvPr id="9" name="">
             <a:extLst xmlns:a="http://schemas.openxmlformats.org/drawingml/2006/main">
               <a:ext uri="{FF2B5EF4-FFF2-40B4-BE49-F238E27FC236}">
-                <a16:creationId xmlns:a16="http://schemas.microsoft.com/office/drawing/2014/main" id="{ED934793-0C37-4168-AA8F-F1847B05CF0E}"/>
+                <a16:creationId xmlns:a16="http://schemas.microsoft.com/office/drawing/2014/main" id="{FEBA03E6-A417-40B1-97C6-203287C4CEE9}"/>
               </a:ext>
             </a:extLst>
           </p:cNvPr>
@@ -9572,7 +9580,7 @@
           <p:cNvPr id="10" name="">
             <a:extLst xmlns:a="http://schemas.openxmlformats.org/drawingml/2006/main">
               <a:ext uri="{FF2B5EF4-FFF2-40B4-BE49-F238E27FC236}">
-                <a16:creationId xmlns:a16="http://schemas.microsoft.com/office/drawing/2014/main" id="{C947DE4A-68A6-4D2B-9EB3-7C74BDAD9C41}"/>
+                <a16:creationId xmlns:a16="http://schemas.microsoft.com/office/drawing/2014/main" id="{1FF86465-98F2-4FF1-A9FE-2ABCC7B8C706}"/>
               </a:ext>
             </a:extLst>
           </p:cNvPr>
@@ -9629,7 +9637,7 @@
           <p:cNvPr id="11" name="">
             <a:extLst xmlns:a="http://schemas.openxmlformats.org/drawingml/2006/main">
               <a:ext uri="{FF2B5EF4-FFF2-40B4-BE49-F238E27FC236}">
-                <a16:creationId xmlns:a16="http://schemas.microsoft.com/office/drawing/2014/main" id="{803FC9AB-C46F-43E2-B615-469579F28169}"/>
+                <a16:creationId xmlns:a16="http://schemas.microsoft.com/office/drawing/2014/main" id="{81F7A71E-C5D9-420A-B8CC-418201A34D7D}"/>
               </a:ext>
             </a:extLst>
           </p:cNvPr>
@@ -9686,7 +9694,7 @@
           <p:cNvPr id="12" name="">
             <a:extLst xmlns:a="http://schemas.openxmlformats.org/drawingml/2006/main">
               <a:ext uri="{FF2B5EF4-FFF2-40B4-BE49-F238E27FC236}">
-                <a16:creationId xmlns:a16="http://schemas.microsoft.com/office/drawing/2014/main" id="{E03A5AE4-3447-432E-99AC-4939E0092B94}"/>
+                <a16:creationId xmlns:a16="http://schemas.microsoft.com/office/drawing/2014/main" id="{C73BC656-EC70-432D-B45C-76D5BA6EC0AA}"/>
               </a:ext>
             </a:extLst>
           </p:cNvPr>
@@ -9718,7 +9726,7 @@
           <p:cNvPr id="13" name="">
             <a:extLst xmlns:a="http://schemas.openxmlformats.org/drawingml/2006/main">
               <a:ext uri="{FF2B5EF4-FFF2-40B4-BE49-F238E27FC236}">
-                <a16:creationId xmlns:a16="http://schemas.microsoft.com/office/drawing/2014/main" id="{740DC030-0032-447E-A350-2D60217C6B46}"/>
+                <a16:creationId xmlns:a16="http://schemas.microsoft.com/office/drawing/2014/main" id="{A8B17291-8FAB-457D-A48F-456A3C34C4B9}"/>
               </a:ext>
             </a:extLst>
           </p:cNvPr>
@@ -9775,7 +9783,7 @@
           <p:cNvPr id="14" name="">
             <a:extLst xmlns:a="http://schemas.openxmlformats.org/drawingml/2006/main">
               <a:ext uri="{FF2B5EF4-FFF2-40B4-BE49-F238E27FC236}">
-                <a16:creationId xmlns:a16="http://schemas.microsoft.com/office/drawing/2014/main" id="{6671C4D1-E9A1-48E6-AD74-EBDDBCC3449F}"/>
+                <a16:creationId xmlns:a16="http://schemas.microsoft.com/office/drawing/2014/main" id="{CAC1BB29-9265-4A39-AED1-4709CB728B7E}"/>
               </a:ext>
             </a:extLst>
           </p:cNvPr>
@@ -9830,7 +9838,7 @@
     </p:spTree>
     <p:extLst>
       <p:ext uri="{BB962C8B-B14F-4D97-AF65-F5344CB8AC3E}">
-        <p14:creationId xmlns:p14="http://schemas.microsoft.com/office/powerpoint/2010/main" val="845876146"/>
+        <p14:creationId xmlns:p14="http://schemas.microsoft.com/office/powerpoint/2010/main" val="688349263"/>
       </p:ext>
     </p:extLst>
   </p:cSld>
@@ -10031,7 +10039,7 @@
           <p:cNvPr id="16" name="">
             <a:extLst xmlns:a="http://schemas.openxmlformats.org/drawingml/2006/main">
               <a:ext uri="{FF2B5EF4-FFF2-40B4-BE49-F238E27FC236}">
-                <a16:creationId xmlns:a16="http://schemas.microsoft.com/office/drawing/2014/main" id="{E9CCB159-CA41-411F-BC94-98273BB2805B}"/>
+                <a16:creationId xmlns:a16="http://schemas.microsoft.com/office/drawing/2014/main" id="{77FAAF13-BB16-4A10-9551-E6544CCBC9C6}"/>
               </a:ext>
             </a:extLst>
           </p:cNvPr>
@@ -10063,7 +10071,7 @@
           <p:cNvPr id="2" name="">
             <a:extLst xmlns:a="http://schemas.openxmlformats.org/drawingml/2006/main">
               <a:ext uri="{FF2B5EF4-FFF2-40B4-BE49-F238E27FC236}">
-                <a16:creationId xmlns:a16="http://schemas.microsoft.com/office/drawing/2014/main" id="{DE73217B-0936-46E8-99E7-D0202244B830}"/>
+                <a16:creationId xmlns:a16="http://schemas.microsoft.com/office/drawing/2014/main" id="{45C143E7-7A8A-40E0-A4F1-8A4EC716B603}"/>
               </a:ext>
             </a:extLst>
           </p:cNvPr>
@@ -10120,7 +10128,7 @@
           <p:cNvPr id="3" name="">
             <a:extLst xmlns:a="http://schemas.openxmlformats.org/drawingml/2006/main">
               <a:ext uri="{FF2B5EF4-FFF2-40B4-BE49-F238E27FC236}">
-                <a16:creationId xmlns:a16="http://schemas.microsoft.com/office/drawing/2014/main" id="{78F97ADC-F2B5-40CB-8CCD-A6B5AF4CFFCC}"/>
+                <a16:creationId xmlns:a16="http://schemas.microsoft.com/office/drawing/2014/main" id="{D71D4D32-458C-4910-B6E6-8A8969008E76}"/>
               </a:ext>
             </a:extLst>
           </p:cNvPr>
@@ -10152,7 +10160,7 @@
           <p:cNvPr id="4" name="">
             <a:extLst xmlns:a="http://schemas.openxmlformats.org/drawingml/2006/main">
               <a:ext uri="{FF2B5EF4-FFF2-40B4-BE49-F238E27FC236}">
-                <a16:creationId xmlns:a16="http://schemas.microsoft.com/office/drawing/2014/main" id="{DC939E67-EAEC-48F6-85A8-6E55ED9AAB4A}"/>
+                <a16:creationId xmlns:a16="http://schemas.microsoft.com/office/drawing/2014/main" id="{1D34383C-2A85-4D59-BCC8-F5C0C7A4AD78}"/>
               </a:ext>
             </a:extLst>
           </p:cNvPr>
@@ -10209,7 +10217,7 @@
           <p:cNvPr id="5" name="">
             <a:extLst xmlns:a="http://schemas.openxmlformats.org/drawingml/2006/main">
               <a:ext uri="{FF2B5EF4-FFF2-40B4-BE49-F238E27FC236}">
-                <a16:creationId xmlns:a16="http://schemas.microsoft.com/office/drawing/2014/main" id="{6A42CAB9-D897-423D-8495-72F1776A1BB3}"/>
+                <a16:creationId xmlns:a16="http://schemas.microsoft.com/office/drawing/2014/main" id="{9F55D936-DAB0-499F-87E1-8AA9639073B5}"/>
               </a:ext>
             </a:extLst>
           </p:cNvPr>
@@ -10266,7 +10274,7 @@
           <p:cNvPr id="6" name="">
             <a:extLst xmlns:a="http://schemas.openxmlformats.org/drawingml/2006/main">
               <a:ext uri="{FF2B5EF4-FFF2-40B4-BE49-F238E27FC236}">
-                <a16:creationId xmlns:a16="http://schemas.microsoft.com/office/drawing/2014/main" id="{934C2250-7684-41CA-9E53-13BABD7BDE2F}"/>
+                <a16:creationId xmlns:a16="http://schemas.microsoft.com/office/drawing/2014/main" id="{CF033AFF-40CA-4A77-A354-659F9CE823B7}"/>
               </a:ext>
             </a:extLst>
           </p:cNvPr>
@@ -10323,7 +10331,7 @@
           <p:cNvPr id="7" name="">
             <a:extLst xmlns:a="http://schemas.openxmlformats.org/drawingml/2006/main">
               <a:ext uri="{FF2B5EF4-FFF2-40B4-BE49-F238E27FC236}">
-                <a16:creationId xmlns:a16="http://schemas.microsoft.com/office/drawing/2014/main" id="{A89FC1BF-00E4-45CC-A1B0-81897E1B8D36}"/>
+                <a16:creationId xmlns:a16="http://schemas.microsoft.com/office/drawing/2014/main" id="{AEE27E4C-9D68-436D-B246-CFEED8D78BBE}"/>
               </a:ext>
             </a:extLst>
           </p:cNvPr>
@@ -10355,7 +10363,7 @@
           <p:cNvPr id="8" name="">
             <a:extLst xmlns:a="http://schemas.openxmlformats.org/drawingml/2006/main">
               <a:ext uri="{FF2B5EF4-FFF2-40B4-BE49-F238E27FC236}">
-                <a16:creationId xmlns:a16="http://schemas.microsoft.com/office/drawing/2014/main" id="{EB8E5A1A-3B02-40B7-991E-9FF0F258B789}"/>
+                <a16:creationId xmlns:a16="http://schemas.microsoft.com/office/drawing/2014/main" id="{9FE327EE-CBE0-4AC4-BBA9-999066904902}"/>
               </a:ext>
             </a:extLst>
           </p:cNvPr>
@@ -10412,7 +10420,7 @@
           <p:cNvPr id="9" name="">
             <a:extLst xmlns:a="http://schemas.openxmlformats.org/drawingml/2006/main">
               <a:ext uri="{FF2B5EF4-FFF2-40B4-BE49-F238E27FC236}">
-                <a16:creationId xmlns:a16="http://schemas.microsoft.com/office/drawing/2014/main" id="{198E4A50-DCC0-47C7-8BBC-3764BD170A09}"/>
+                <a16:creationId xmlns:a16="http://schemas.microsoft.com/office/drawing/2014/main" id="{A88B7683-13D0-498D-A09D-89AA7FABE79A}"/>
               </a:ext>
             </a:extLst>
           </p:cNvPr>
@@ -10469,7 +10477,7 @@
           <p:cNvPr id="10" name="">
             <a:extLst xmlns:a="http://schemas.openxmlformats.org/drawingml/2006/main">
               <a:ext uri="{FF2B5EF4-FFF2-40B4-BE49-F238E27FC236}">
-                <a16:creationId xmlns:a16="http://schemas.microsoft.com/office/drawing/2014/main" id="{E60D5247-3EAA-4E33-89B3-B69E936DB311}"/>
+                <a16:creationId xmlns:a16="http://schemas.microsoft.com/office/drawing/2014/main" id="{1A55C591-C3B8-4495-A2EB-BF7A7FDC1738}"/>
               </a:ext>
             </a:extLst>
           </p:cNvPr>
@@ -10526,7 +10534,7 @@
           <p:cNvPr id="11" name="">
             <a:extLst xmlns:a="http://schemas.openxmlformats.org/drawingml/2006/main">
               <a:ext uri="{FF2B5EF4-FFF2-40B4-BE49-F238E27FC236}">
-                <a16:creationId xmlns:a16="http://schemas.microsoft.com/office/drawing/2014/main" id="{31B170B7-A77F-4A53-92CC-80311986F312}"/>
+                <a16:creationId xmlns:a16="http://schemas.microsoft.com/office/drawing/2014/main" id="{6F47B428-37A3-49B6-A5BE-08E2C1A72EDE}"/>
               </a:ext>
             </a:extLst>
           </p:cNvPr>
@@ -10583,7 +10591,7 @@
           <p:cNvPr id="12" name="">
             <a:extLst xmlns:a="http://schemas.openxmlformats.org/drawingml/2006/main">
               <a:ext uri="{FF2B5EF4-FFF2-40B4-BE49-F238E27FC236}">
-                <a16:creationId xmlns:a16="http://schemas.microsoft.com/office/drawing/2014/main" id="{61A01BCD-1665-435C-8865-31F8DF803ABA}"/>
+                <a16:creationId xmlns:a16="http://schemas.microsoft.com/office/drawing/2014/main" id="{09DB767A-F65C-4495-8BCB-9BE3436D02F0}"/>
               </a:ext>
             </a:extLst>
           </p:cNvPr>
@@ -10640,7 +10648,7 @@
           <p:cNvPr id="13" name="">
             <a:extLst xmlns:a="http://schemas.openxmlformats.org/drawingml/2006/main">
               <a:ext uri="{FF2B5EF4-FFF2-40B4-BE49-F238E27FC236}">
-                <a16:creationId xmlns:a16="http://schemas.microsoft.com/office/drawing/2014/main" id="{2BF79845-C96A-4D97-9E14-43264B2DF35F}"/>
+                <a16:creationId xmlns:a16="http://schemas.microsoft.com/office/drawing/2014/main" id="{FE78413D-2CC3-4909-9754-9FEBBF61C459}"/>
               </a:ext>
             </a:extLst>
           </p:cNvPr>
@@ -10697,7 +10705,7 @@
           <p:cNvPr id="14" name="">
             <a:extLst xmlns:a="http://schemas.openxmlformats.org/drawingml/2006/main">
               <a:ext uri="{FF2B5EF4-FFF2-40B4-BE49-F238E27FC236}">
-                <a16:creationId xmlns:a16="http://schemas.microsoft.com/office/drawing/2014/main" id="{96B04D23-F265-4ADA-A77B-EAD4996D19CF}"/>
+                <a16:creationId xmlns:a16="http://schemas.microsoft.com/office/drawing/2014/main" id="{69F15E56-55AB-4BF1-89DF-0A63AFC5581A}"/>
               </a:ext>
             </a:extLst>
           </p:cNvPr>
@@ -10754,7 +10762,7 @@
           <p:cNvPr id="15" name="">
             <a:extLst xmlns:a="http://schemas.openxmlformats.org/drawingml/2006/main">
               <a:ext uri="{FF2B5EF4-FFF2-40B4-BE49-F238E27FC236}">
-                <a16:creationId xmlns:a16="http://schemas.microsoft.com/office/drawing/2014/main" id="{AF828028-275C-408A-B4EA-1BCD46D65E9C}"/>
+                <a16:creationId xmlns:a16="http://schemas.microsoft.com/office/drawing/2014/main" id="{E7422E73-B5E7-4577-AD50-2A3039311EF3}"/>
               </a:ext>
             </a:extLst>
           </p:cNvPr>
@@ -10809,7 +10817,7 @@
     </p:spTree>
     <p:extLst>
       <p:ext uri="{BB962C8B-B14F-4D97-AF65-F5344CB8AC3E}">
-        <p14:creationId xmlns:p14="http://schemas.microsoft.com/office/powerpoint/2010/main" val="549801268"/>
+        <p14:creationId xmlns:p14="http://schemas.microsoft.com/office/powerpoint/2010/main" val="427512283"/>
       </p:ext>
     </p:extLst>
   </p:cSld>
@@ -10964,7 +10972,7 @@
           <p:cNvPr id="16" name="">
             <a:extLst xmlns:a="http://schemas.openxmlformats.org/drawingml/2006/main">
               <a:ext uri="{FF2B5EF4-FFF2-40B4-BE49-F238E27FC236}">
-                <a16:creationId xmlns:a16="http://schemas.microsoft.com/office/drawing/2014/main" id="{5A33A25D-C86B-4E1B-AEC1-9348B36BD4F7}"/>
+                <a16:creationId xmlns:a16="http://schemas.microsoft.com/office/drawing/2014/main" id="{3408E698-0FE6-4EDC-A88C-5D64C794CBB9}"/>
               </a:ext>
             </a:extLst>
           </p:cNvPr>
@@ -10996,7 +11004,7 @@
           <p:cNvPr id="2" name="">
             <a:extLst xmlns:a="http://schemas.openxmlformats.org/drawingml/2006/main">
               <a:ext uri="{FF2B5EF4-FFF2-40B4-BE49-F238E27FC236}">
-                <a16:creationId xmlns:a16="http://schemas.microsoft.com/office/drawing/2014/main" id="{B06DB6A6-AB13-4E66-99A3-E6DC9CB3E565}"/>
+                <a16:creationId xmlns:a16="http://schemas.microsoft.com/office/drawing/2014/main" id="{2B7B953C-D512-42EF-9972-122CBE6D6AF5}"/>
               </a:ext>
             </a:extLst>
           </p:cNvPr>
@@ -11053,7 +11061,7 @@
           <p:cNvPr id="3" name="">
             <a:extLst xmlns:a="http://schemas.openxmlformats.org/drawingml/2006/main">
               <a:ext uri="{FF2B5EF4-FFF2-40B4-BE49-F238E27FC236}">
-                <a16:creationId xmlns:a16="http://schemas.microsoft.com/office/drawing/2014/main" id="{1A4187BC-2D1B-47EF-ABCA-5E3B04062436}"/>
+                <a16:creationId xmlns:a16="http://schemas.microsoft.com/office/drawing/2014/main" id="{CC2F1168-1473-45E1-A5A1-80CEFC2FBA45}"/>
               </a:ext>
             </a:extLst>
           </p:cNvPr>
@@ -11085,7 +11093,7 @@
           <p:cNvPr id="4" name="">
             <a:extLst xmlns:a="http://schemas.openxmlformats.org/drawingml/2006/main">
               <a:ext uri="{FF2B5EF4-FFF2-40B4-BE49-F238E27FC236}">
-                <a16:creationId xmlns:a16="http://schemas.microsoft.com/office/drawing/2014/main" id="{E1EEF7F2-B325-44E0-AB5D-B2C46D2D4B72}"/>
+                <a16:creationId xmlns:a16="http://schemas.microsoft.com/office/drawing/2014/main" id="{9782F799-3B1C-4AFD-B4E9-40BC18CD21A6}"/>
               </a:ext>
             </a:extLst>
           </p:cNvPr>
@@ -11142,7 +11150,7 @@
           <p:cNvPr id="5" name="">
             <a:extLst xmlns:a="http://schemas.openxmlformats.org/drawingml/2006/main">
               <a:ext uri="{FF2B5EF4-FFF2-40B4-BE49-F238E27FC236}">
-                <a16:creationId xmlns:a16="http://schemas.microsoft.com/office/drawing/2014/main" id="{7D16A5C5-A642-4B0F-8142-3DE879542F11}"/>
+                <a16:creationId xmlns:a16="http://schemas.microsoft.com/office/drawing/2014/main" id="{607F3000-81EC-4D6E-ACCF-E27C89910F46}"/>
               </a:ext>
             </a:extLst>
           </p:cNvPr>
@@ -11199,7 +11207,7 @@
           <p:cNvPr id="6" name="">
             <a:extLst xmlns:a="http://schemas.openxmlformats.org/drawingml/2006/main">
               <a:ext uri="{FF2B5EF4-FFF2-40B4-BE49-F238E27FC236}">
-                <a16:creationId xmlns:a16="http://schemas.microsoft.com/office/drawing/2014/main" id="{5DB69878-D162-4658-BA61-E5897C34E33F}"/>
+                <a16:creationId xmlns:a16="http://schemas.microsoft.com/office/drawing/2014/main" id="{DCD2B97C-7E8D-4B1B-95AA-D72EB0D3BCF8}"/>
               </a:ext>
             </a:extLst>
           </p:cNvPr>
@@ -11256,7 +11264,7 @@
           <p:cNvPr id="7" name="">
             <a:extLst xmlns:a="http://schemas.openxmlformats.org/drawingml/2006/main">
               <a:ext uri="{FF2B5EF4-FFF2-40B4-BE49-F238E27FC236}">
-                <a16:creationId xmlns:a16="http://schemas.microsoft.com/office/drawing/2014/main" id="{7748B0BB-5D17-445C-96CF-07969DE73920}"/>
+                <a16:creationId xmlns:a16="http://schemas.microsoft.com/office/drawing/2014/main" id="{41FAFC37-4E23-481D-909B-CA69903659E3}"/>
               </a:ext>
             </a:extLst>
           </p:cNvPr>
@@ -11288,7 +11296,7 @@
           <p:cNvPr id="8" name="">
             <a:extLst xmlns:a="http://schemas.openxmlformats.org/drawingml/2006/main">
               <a:ext uri="{FF2B5EF4-FFF2-40B4-BE49-F238E27FC236}">
-                <a16:creationId xmlns:a16="http://schemas.microsoft.com/office/drawing/2014/main" id="{DDAB22BE-1E20-46E8-B03B-C98CFF05BA1D}"/>
+                <a16:creationId xmlns:a16="http://schemas.microsoft.com/office/drawing/2014/main" id="{6BFC5616-0C8B-4523-8477-212A2C794F54}"/>
               </a:ext>
             </a:extLst>
           </p:cNvPr>
@@ -11345,7 +11353,7 @@
           <p:cNvPr id="9" name="">
             <a:extLst xmlns:a="http://schemas.openxmlformats.org/drawingml/2006/main">
               <a:ext uri="{FF2B5EF4-FFF2-40B4-BE49-F238E27FC236}">
-                <a16:creationId xmlns:a16="http://schemas.microsoft.com/office/drawing/2014/main" id="{51F94E8A-6060-4EE1-9C92-0FB43E186C9A}"/>
+                <a16:creationId xmlns:a16="http://schemas.microsoft.com/office/drawing/2014/main" id="{AB7DADCD-F979-4CF9-9729-076765DEC819}"/>
               </a:ext>
             </a:extLst>
           </p:cNvPr>
@@ -11406,7 +11414,7 @@
           <p:nvPr/>
         </p:nvPicPr>
         <p:blipFill>
-          <a:blip xmlns:r="http://schemas.openxmlformats.org/officeDocument/2006/relationships" xmlns:a="http://schemas.openxmlformats.org/drawingml/2006/main" r:embed="Rca05a7671183495e"/>
+          <a:blip xmlns:r="http://schemas.openxmlformats.org/officeDocument/2006/relationships" xmlns:a="http://schemas.openxmlformats.org/drawingml/2006/main" r:embed="Rbc3897ef4d234985"/>
           <a:stretch xmlns:a="http://schemas.openxmlformats.org/drawingml/2006/main"/>
         </p:blipFill>
         <p:spPr>
@@ -11424,7 +11432,7 @@
           <p:cNvPr id="11" name="">
             <a:extLst xmlns:a="http://schemas.openxmlformats.org/drawingml/2006/main">
               <a:ext uri="{FF2B5EF4-FFF2-40B4-BE49-F238E27FC236}">
-                <a16:creationId xmlns:a16="http://schemas.microsoft.com/office/drawing/2014/main" id="{5D0B66FB-A5BF-4345-805D-017C13BE3A08}"/>
+                <a16:creationId xmlns:a16="http://schemas.microsoft.com/office/drawing/2014/main" id="{F6A7F072-FE10-4B37-87AB-22A06B0AF080}"/>
               </a:ext>
             </a:extLst>
           </p:cNvPr>
@@ -11481,7 +11489,7 @@
           <p:cNvPr id="12" name="">
             <a:extLst xmlns:a="http://schemas.openxmlformats.org/drawingml/2006/main">
               <a:ext uri="{FF2B5EF4-FFF2-40B4-BE49-F238E27FC236}">
-                <a16:creationId xmlns:a16="http://schemas.microsoft.com/office/drawing/2014/main" id="{18744A39-FC3B-4BBF-A553-1E6C11D7E5BD}"/>
+                <a16:creationId xmlns:a16="http://schemas.microsoft.com/office/drawing/2014/main" id="{1C00D26C-A1AE-42B0-8586-48847CC03FA3}"/>
               </a:ext>
             </a:extLst>
           </p:cNvPr>
@@ -11538,7 +11546,7 @@
           <p:cNvPr id="13" name="">
             <a:extLst xmlns:a="http://schemas.openxmlformats.org/drawingml/2006/main">
               <a:ext uri="{FF2B5EF4-FFF2-40B4-BE49-F238E27FC236}">
-                <a16:creationId xmlns:a16="http://schemas.microsoft.com/office/drawing/2014/main" id="{C2D334B0-9DE4-42C8-ACD6-146663C89D53}"/>
+                <a16:creationId xmlns:a16="http://schemas.microsoft.com/office/drawing/2014/main" id="{2A3B33AA-632B-400F-BF9A-23B6BA409823}"/>
               </a:ext>
             </a:extLst>
           </p:cNvPr>
@@ -11570,7 +11578,7 @@
           <p:cNvPr id="14" name="">
             <a:extLst xmlns:a="http://schemas.openxmlformats.org/drawingml/2006/main">
               <a:ext uri="{FF2B5EF4-FFF2-40B4-BE49-F238E27FC236}">
-                <a16:creationId xmlns:a16="http://schemas.microsoft.com/office/drawing/2014/main" id="{72616CD8-4A11-4051-9207-ED1FE3829910}"/>
+                <a16:creationId xmlns:a16="http://schemas.microsoft.com/office/drawing/2014/main" id="{5782166F-082A-4E3E-A367-3C965084A1EB}"/>
               </a:ext>
             </a:extLst>
           </p:cNvPr>
@@ -11627,7 +11635,7 @@
           <p:cNvPr id="15" name="">
             <a:extLst xmlns:a="http://schemas.openxmlformats.org/drawingml/2006/main">
               <a:ext uri="{FF2B5EF4-FFF2-40B4-BE49-F238E27FC236}">
-                <a16:creationId xmlns:a16="http://schemas.microsoft.com/office/drawing/2014/main" id="{578F1E59-8ADE-4BD1-A476-CC48C539A1A8}"/>
+                <a16:creationId xmlns:a16="http://schemas.microsoft.com/office/drawing/2014/main" id="{16D48FBA-5518-4475-A271-8758360CF9CC}"/>
               </a:ext>
             </a:extLst>
           </p:cNvPr>
@@ -11682,7 +11690,7 @@
     </p:spTree>
     <p:extLst>
       <p:ext uri="{BB962C8B-B14F-4D97-AF65-F5344CB8AC3E}">
-        <p14:creationId xmlns:p14="http://schemas.microsoft.com/office/powerpoint/2010/main" val="720045424"/>
+        <p14:creationId xmlns:p14="http://schemas.microsoft.com/office/powerpoint/2010/main" val="725634870"/>
       </p:ext>
     </p:extLst>
   </p:cSld>
@@ -11837,7 +11845,7 @@
           <p:cNvPr id="23" name="">
             <a:extLst xmlns:a="http://schemas.openxmlformats.org/drawingml/2006/main">
               <a:ext uri="{FF2B5EF4-FFF2-40B4-BE49-F238E27FC236}">
-                <a16:creationId xmlns:a16="http://schemas.microsoft.com/office/drawing/2014/main" id="{C5135D9A-0A3B-4012-AE02-871E8B117F93}"/>
+                <a16:creationId xmlns:a16="http://schemas.microsoft.com/office/drawing/2014/main" id="{99B1CA86-0B2C-4E84-805F-8727B65CC99E}"/>
               </a:ext>
             </a:extLst>
           </p:cNvPr>
@@ -11869,7 +11877,7 @@
           <p:cNvPr id="2" name="">
             <a:extLst xmlns:a="http://schemas.openxmlformats.org/drawingml/2006/main">
               <a:ext uri="{FF2B5EF4-FFF2-40B4-BE49-F238E27FC236}">
-                <a16:creationId xmlns:a16="http://schemas.microsoft.com/office/drawing/2014/main" id="{94CE6EEE-FF8E-4661-B4D3-EF46811FD34C}"/>
+                <a16:creationId xmlns:a16="http://schemas.microsoft.com/office/drawing/2014/main" id="{16F49DD2-BC2F-407F-9052-1DA2EE3FC1D3}"/>
               </a:ext>
             </a:extLst>
           </p:cNvPr>
@@ -11926,7 +11934,7 @@
           <p:cNvPr id="3" name="">
             <a:extLst xmlns:a="http://schemas.openxmlformats.org/drawingml/2006/main">
               <a:ext uri="{FF2B5EF4-FFF2-40B4-BE49-F238E27FC236}">
-                <a16:creationId xmlns:a16="http://schemas.microsoft.com/office/drawing/2014/main" id="{6700BE73-FA45-4C23-A5A4-F2FF62A2D906}"/>
+                <a16:creationId xmlns:a16="http://schemas.microsoft.com/office/drawing/2014/main" id="{740994FD-98F3-4EC8-B57B-EE4156104E12}"/>
               </a:ext>
             </a:extLst>
           </p:cNvPr>
@@ -11958,7 +11966,7 @@
           <p:cNvPr id="4" name="">
             <a:extLst xmlns:a="http://schemas.openxmlformats.org/drawingml/2006/main">
               <a:ext uri="{FF2B5EF4-FFF2-40B4-BE49-F238E27FC236}">
-                <a16:creationId xmlns:a16="http://schemas.microsoft.com/office/drawing/2014/main" id="{1106C1F1-6AD2-4865-80AF-C6468F4BD1CB}"/>
+                <a16:creationId xmlns:a16="http://schemas.microsoft.com/office/drawing/2014/main" id="{BDCEF77A-3E84-43A3-B087-70CF0A8254DB}"/>
               </a:ext>
             </a:extLst>
           </p:cNvPr>
@@ -12015,7 +12023,7 @@
           <p:cNvPr id="5" name="">
             <a:extLst xmlns:a="http://schemas.openxmlformats.org/drawingml/2006/main">
               <a:ext uri="{FF2B5EF4-FFF2-40B4-BE49-F238E27FC236}">
-                <a16:creationId xmlns:a16="http://schemas.microsoft.com/office/drawing/2014/main" id="{072FD398-31DB-4963-A7D5-A48ADFE304D9}"/>
+                <a16:creationId xmlns:a16="http://schemas.microsoft.com/office/drawing/2014/main" id="{FFC57694-6DE0-4A6D-8BDD-5F451C4704A9}"/>
               </a:ext>
             </a:extLst>
           </p:cNvPr>
@@ -12072,7 +12080,7 @@
           <p:cNvPr id="6" name="">
             <a:extLst xmlns:a="http://schemas.openxmlformats.org/drawingml/2006/main">
               <a:ext uri="{FF2B5EF4-FFF2-40B4-BE49-F238E27FC236}">
-                <a16:creationId xmlns:a16="http://schemas.microsoft.com/office/drawing/2014/main" id="{3662F460-C1BA-4412-AB47-A35003BD39E1}"/>
+                <a16:creationId xmlns:a16="http://schemas.microsoft.com/office/drawing/2014/main" id="{F5F8C5ED-FA52-4AF7-BA15-F8097DC5882A}"/>
               </a:ext>
             </a:extLst>
           </p:cNvPr>
@@ -12129,7 +12137,7 @@
           <p:cNvPr id="7" name="">
             <a:extLst xmlns:a="http://schemas.openxmlformats.org/drawingml/2006/main">
               <a:ext uri="{FF2B5EF4-FFF2-40B4-BE49-F238E27FC236}">
-                <a16:creationId xmlns:a16="http://schemas.microsoft.com/office/drawing/2014/main" id="{A6C6E3E7-8DC3-4AC3-9C94-B78EA99B09B8}"/>
+                <a16:creationId xmlns:a16="http://schemas.microsoft.com/office/drawing/2014/main" id="{5C9D5B01-30C1-4F14-9B76-29A4702DDF06}"/>
               </a:ext>
             </a:extLst>
           </p:cNvPr>
@@ -12161,7 +12169,7 @@
           <p:cNvPr id="8" name="">
             <a:extLst xmlns:a="http://schemas.openxmlformats.org/drawingml/2006/main">
               <a:ext uri="{FF2B5EF4-FFF2-40B4-BE49-F238E27FC236}">
-                <a16:creationId xmlns:a16="http://schemas.microsoft.com/office/drawing/2014/main" id="{1BEEE00B-1B98-41BE-9746-7D176B976C19}"/>
+                <a16:creationId xmlns:a16="http://schemas.microsoft.com/office/drawing/2014/main" id="{C3D162B9-8755-44AE-8D41-5C98B1DA67B9}"/>
               </a:ext>
             </a:extLst>
           </p:cNvPr>
@@ -12218,7 +12226,7 @@
           <p:cNvPr id="9" name="">
             <a:extLst xmlns:a="http://schemas.openxmlformats.org/drawingml/2006/main">
               <a:ext uri="{FF2B5EF4-FFF2-40B4-BE49-F238E27FC236}">
-                <a16:creationId xmlns:a16="http://schemas.microsoft.com/office/drawing/2014/main" id="{9B20772D-93D3-452D-B711-8D3DCE77F88E}"/>
+                <a16:creationId xmlns:a16="http://schemas.microsoft.com/office/drawing/2014/main" id="{3ACA99FD-E39D-4975-9188-60F9D45B4529}"/>
               </a:ext>
             </a:extLst>
           </p:cNvPr>
@@ -12275,7 +12283,7 @@
           <p:cNvPr id="10" name="">
             <a:extLst xmlns:a="http://schemas.openxmlformats.org/drawingml/2006/main">
               <a:ext uri="{FF2B5EF4-FFF2-40B4-BE49-F238E27FC236}">
-                <a16:creationId xmlns:a16="http://schemas.microsoft.com/office/drawing/2014/main" id="{5CEC2AD0-F2BB-4161-9354-5F71B1FAF4EC}"/>
+                <a16:creationId xmlns:a16="http://schemas.microsoft.com/office/drawing/2014/main" id="{F156D7F7-E198-4DC3-A4E8-431F20573ACA}"/>
               </a:ext>
             </a:extLst>
           </p:cNvPr>
@@ -12309,7 +12317,7 @@
           <p:cNvPr id="11" name="">
             <a:extLst xmlns:a="http://schemas.openxmlformats.org/drawingml/2006/main">
               <a:ext uri="{FF2B5EF4-FFF2-40B4-BE49-F238E27FC236}">
-                <a16:creationId xmlns:a16="http://schemas.microsoft.com/office/drawing/2014/main" id="{093FB87B-9678-4125-8356-99C9DD2C5F19}"/>
+                <a16:creationId xmlns:a16="http://schemas.microsoft.com/office/drawing/2014/main" id="{8DEE1842-1F12-4183-85E8-2D14A5D46CCA}"/>
               </a:ext>
             </a:extLst>
           </p:cNvPr>
@@ -12341,7 +12349,7 @@
           <p:cNvPr id="12" name="">
             <a:extLst xmlns:a="http://schemas.openxmlformats.org/drawingml/2006/main">
               <a:ext uri="{FF2B5EF4-FFF2-40B4-BE49-F238E27FC236}">
-                <a16:creationId xmlns:a16="http://schemas.microsoft.com/office/drawing/2014/main" id="{43D3DC59-7C7C-42E9-A445-085B62C2E284}"/>
+                <a16:creationId xmlns:a16="http://schemas.microsoft.com/office/drawing/2014/main" id="{394475A3-6645-4025-876B-290B7ED425D9}"/>
               </a:ext>
             </a:extLst>
           </p:cNvPr>
@@ -12398,7 +12406,7 @@
           <p:cNvPr id="13" name="">
             <a:extLst xmlns:a="http://schemas.openxmlformats.org/drawingml/2006/main">
               <a:ext uri="{FF2B5EF4-FFF2-40B4-BE49-F238E27FC236}">
-                <a16:creationId xmlns:a16="http://schemas.microsoft.com/office/drawing/2014/main" id="{C07EB9B3-144C-4C52-A331-5A2CCE5A69C7}"/>
+                <a16:creationId xmlns:a16="http://schemas.microsoft.com/office/drawing/2014/main" id="{0DBCAE87-350C-4EDE-A0C1-BF1E557FAE6C}"/>
               </a:ext>
             </a:extLst>
           </p:cNvPr>
@@ -12455,7 +12463,7 @@
           <p:cNvPr id="14" name="">
             <a:extLst xmlns:a="http://schemas.openxmlformats.org/drawingml/2006/main">
               <a:ext uri="{FF2B5EF4-FFF2-40B4-BE49-F238E27FC236}">
-                <a16:creationId xmlns:a16="http://schemas.microsoft.com/office/drawing/2014/main" id="{B33075CF-AFC2-448D-8631-86AE9339C55A}"/>
+                <a16:creationId xmlns:a16="http://schemas.microsoft.com/office/drawing/2014/main" id="{96158E20-A064-4A22-BEA4-C0D8F3A8EE5D}"/>
               </a:ext>
             </a:extLst>
           </p:cNvPr>
@@ -12489,7 +12497,7 @@
           <p:cNvPr id="15" name="">
             <a:extLst xmlns:a="http://schemas.openxmlformats.org/drawingml/2006/main">
               <a:ext uri="{FF2B5EF4-FFF2-40B4-BE49-F238E27FC236}">
-                <a16:creationId xmlns:a16="http://schemas.microsoft.com/office/drawing/2014/main" id="{1EF4E3FF-81B0-42EC-A64F-9720E2C36261}"/>
+                <a16:creationId xmlns:a16="http://schemas.microsoft.com/office/drawing/2014/main" id="{06619E8A-2C19-4C63-B1DE-F7BF2197582C}"/>
               </a:ext>
             </a:extLst>
           </p:cNvPr>
@@ -12521,7 +12529,7 @@
           <p:cNvPr id="16" name="">
             <a:extLst xmlns:a="http://schemas.openxmlformats.org/drawingml/2006/main">
               <a:ext uri="{FF2B5EF4-FFF2-40B4-BE49-F238E27FC236}">
-                <a16:creationId xmlns:a16="http://schemas.microsoft.com/office/drawing/2014/main" id="{72BEF5A6-20AE-4314-875F-BE5FB44604B4}"/>
+                <a16:creationId xmlns:a16="http://schemas.microsoft.com/office/drawing/2014/main" id="{AE5899F8-A429-454E-9D9B-C37C31BE59D3}"/>
               </a:ext>
             </a:extLst>
           </p:cNvPr>
@@ -12578,7 +12586,7 @@
           <p:cNvPr id="17" name="">
             <a:extLst xmlns:a="http://schemas.openxmlformats.org/drawingml/2006/main">
               <a:ext uri="{FF2B5EF4-FFF2-40B4-BE49-F238E27FC236}">
-                <a16:creationId xmlns:a16="http://schemas.microsoft.com/office/drawing/2014/main" id="{698B7680-1547-4A20-8199-8042C48B9DDB}"/>
+                <a16:creationId xmlns:a16="http://schemas.microsoft.com/office/drawing/2014/main" id="{D32B97EC-829E-49CD-8225-200364C1C020}"/>
               </a:ext>
             </a:extLst>
           </p:cNvPr>
@@ -12635,7 +12643,7 @@
           <p:cNvPr id="18" name="">
             <a:extLst xmlns:a="http://schemas.openxmlformats.org/drawingml/2006/main">
               <a:ext uri="{FF2B5EF4-FFF2-40B4-BE49-F238E27FC236}">
-                <a16:creationId xmlns:a16="http://schemas.microsoft.com/office/drawing/2014/main" id="{8855EC7A-C31B-4612-9F87-82E72332D5BA}"/>
+                <a16:creationId xmlns:a16="http://schemas.microsoft.com/office/drawing/2014/main" id="{C90C403E-7898-46A3-B88E-79BC4168BE76}"/>
               </a:ext>
             </a:extLst>
           </p:cNvPr>
@@ -12669,7 +12677,7 @@
           <p:cNvPr id="19" name="">
             <a:extLst xmlns:a="http://schemas.openxmlformats.org/drawingml/2006/main">
               <a:ext uri="{FF2B5EF4-FFF2-40B4-BE49-F238E27FC236}">
-                <a16:creationId xmlns:a16="http://schemas.microsoft.com/office/drawing/2014/main" id="{7F9AA7C4-B4B6-4086-8317-A5AC0CF9C71B}"/>
+                <a16:creationId xmlns:a16="http://schemas.microsoft.com/office/drawing/2014/main" id="{64C32CFE-3CD0-460A-A020-55FAD3FAC40A}"/>
               </a:ext>
             </a:extLst>
           </p:cNvPr>
@@ -12701,7 +12709,7 @@
           <p:cNvPr id="20" name="">
             <a:extLst xmlns:a="http://schemas.openxmlformats.org/drawingml/2006/main">
               <a:ext uri="{FF2B5EF4-FFF2-40B4-BE49-F238E27FC236}">
-                <a16:creationId xmlns:a16="http://schemas.microsoft.com/office/drawing/2014/main" id="{60077CDB-46B8-4BA8-A32B-D69DA62A93EC}"/>
+                <a16:creationId xmlns:a16="http://schemas.microsoft.com/office/drawing/2014/main" id="{E93746B9-092C-4F6F-99FE-1BAD1ACFD1F2}"/>
               </a:ext>
             </a:extLst>
           </p:cNvPr>
@@ -12758,7 +12766,7 @@
           <p:cNvPr id="21" name="">
             <a:extLst xmlns:a="http://schemas.openxmlformats.org/drawingml/2006/main">
               <a:ext uri="{FF2B5EF4-FFF2-40B4-BE49-F238E27FC236}">
-                <a16:creationId xmlns:a16="http://schemas.microsoft.com/office/drawing/2014/main" id="{139D5E99-6869-463A-AFF5-64B0B01D1F7E}"/>
+                <a16:creationId xmlns:a16="http://schemas.microsoft.com/office/drawing/2014/main" id="{62DFD2FC-D972-4F39-8F8C-EF3AF4C3FE0C}"/>
               </a:ext>
             </a:extLst>
           </p:cNvPr>
@@ -12815,7 +12823,7 @@
           <p:cNvPr id="22" name="">
             <a:extLst xmlns:a="http://schemas.openxmlformats.org/drawingml/2006/main">
               <a:ext uri="{FF2B5EF4-FFF2-40B4-BE49-F238E27FC236}">
-                <a16:creationId xmlns:a16="http://schemas.microsoft.com/office/drawing/2014/main" id="{EE42311A-89B6-4557-A614-FA7BE193380E}"/>
+                <a16:creationId xmlns:a16="http://schemas.microsoft.com/office/drawing/2014/main" id="{704AAF69-08AE-4DB1-BB61-C294D38A7C9D}"/>
               </a:ext>
             </a:extLst>
           </p:cNvPr>
@@ -12870,7 +12878,7 @@
     </p:spTree>
     <p:extLst>
       <p:ext uri="{BB962C8B-B14F-4D97-AF65-F5344CB8AC3E}">
-        <p14:creationId xmlns:p14="http://schemas.microsoft.com/office/powerpoint/2010/main" val="1194364825"/>
+        <p14:creationId xmlns:p14="http://schemas.microsoft.com/office/powerpoint/2010/main" val="688082486"/>
       </p:ext>
     </p:extLst>
   </p:cSld>
@@ -13071,7 +13079,7 @@
           <p:cNvPr id="22" name="">
             <a:extLst xmlns:a="http://schemas.openxmlformats.org/drawingml/2006/main">
               <a:ext uri="{FF2B5EF4-FFF2-40B4-BE49-F238E27FC236}">
-                <a16:creationId xmlns:a16="http://schemas.microsoft.com/office/drawing/2014/main" id="{DB738077-1322-439C-BA17-66C81207DAE9}"/>
+                <a16:creationId xmlns:a16="http://schemas.microsoft.com/office/drawing/2014/main" id="{BB9B08BC-ABE8-462D-8831-5905318B2D39}"/>
               </a:ext>
             </a:extLst>
           </p:cNvPr>
@@ -13103,7 +13111,7 @@
           <p:cNvPr id="2" name="">
             <a:extLst xmlns:a="http://schemas.openxmlformats.org/drawingml/2006/main">
               <a:ext uri="{FF2B5EF4-FFF2-40B4-BE49-F238E27FC236}">
-                <a16:creationId xmlns:a16="http://schemas.microsoft.com/office/drawing/2014/main" id="{2D5E6967-1382-432D-9E9A-6B13EE84594F}"/>
+                <a16:creationId xmlns:a16="http://schemas.microsoft.com/office/drawing/2014/main" id="{0A6E8704-0A25-4B4E-9399-4117C802B892}"/>
               </a:ext>
             </a:extLst>
           </p:cNvPr>
@@ -13160,7 +13168,7 @@
           <p:cNvPr id="3" name="">
             <a:extLst xmlns:a="http://schemas.openxmlformats.org/drawingml/2006/main">
               <a:ext uri="{FF2B5EF4-FFF2-40B4-BE49-F238E27FC236}">
-                <a16:creationId xmlns:a16="http://schemas.microsoft.com/office/drawing/2014/main" id="{B83FE42A-7F08-4596-9DCA-05E32220315E}"/>
+                <a16:creationId xmlns:a16="http://schemas.microsoft.com/office/drawing/2014/main" id="{84E0F9ED-4B8F-415B-BB1E-1ED529F35B1E}"/>
               </a:ext>
             </a:extLst>
           </p:cNvPr>
@@ -13192,7 +13200,7 @@
           <p:cNvPr id="4" name="">
             <a:extLst xmlns:a="http://schemas.openxmlformats.org/drawingml/2006/main">
               <a:ext uri="{FF2B5EF4-FFF2-40B4-BE49-F238E27FC236}">
-                <a16:creationId xmlns:a16="http://schemas.microsoft.com/office/drawing/2014/main" id="{16ADE108-B9CE-47F3-AD87-32962284DD88}"/>
+                <a16:creationId xmlns:a16="http://schemas.microsoft.com/office/drawing/2014/main" id="{550131DB-6F59-437A-8C41-1BAAF683279B}"/>
               </a:ext>
             </a:extLst>
           </p:cNvPr>
@@ -13249,7 +13257,7 @@
           <p:cNvPr id="5" name="">
             <a:extLst xmlns:a="http://schemas.openxmlformats.org/drawingml/2006/main">
               <a:ext uri="{FF2B5EF4-FFF2-40B4-BE49-F238E27FC236}">
-                <a16:creationId xmlns:a16="http://schemas.microsoft.com/office/drawing/2014/main" id="{0A494FB5-B2E5-488F-AADF-675953C003D0}"/>
+                <a16:creationId xmlns:a16="http://schemas.microsoft.com/office/drawing/2014/main" id="{22EB5D73-3728-4184-A103-9FA12E485641}"/>
               </a:ext>
             </a:extLst>
           </p:cNvPr>
@@ -13306,7 +13314,7 @@
           <p:cNvPr id="6" name="">
             <a:extLst xmlns:a="http://schemas.openxmlformats.org/drawingml/2006/main">
               <a:ext uri="{FF2B5EF4-FFF2-40B4-BE49-F238E27FC236}">
-                <a16:creationId xmlns:a16="http://schemas.microsoft.com/office/drawing/2014/main" id="{48D35D38-E78E-464E-8279-7F0086D1F1F0}"/>
+                <a16:creationId xmlns:a16="http://schemas.microsoft.com/office/drawing/2014/main" id="{97F3F8A2-4500-4129-9918-D89724396A95}"/>
               </a:ext>
             </a:extLst>
           </p:cNvPr>
@@ -13363,7 +13371,7 @@
           <p:cNvPr id="7" name="">
             <a:extLst xmlns:a="http://schemas.openxmlformats.org/drawingml/2006/main">
               <a:ext uri="{FF2B5EF4-FFF2-40B4-BE49-F238E27FC236}">
-                <a16:creationId xmlns:a16="http://schemas.microsoft.com/office/drawing/2014/main" id="{74A6BB64-C04B-4FAF-B761-3D13536B96C9}"/>
+                <a16:creationId xmlns:a16="http://schemas.microsoft.com/office/drawing/2014/main" id="{57C2DA93-248A-4AE3-96E3-1985C5A5E6DC}"/>
               </a:ext>
             </a:extLst>
           </p:cNvPr>
@@ -13395,7 +13403,7 @@
           <p:cNvPr id="8" name="">
             <a:extLst xmlns:a="http://schemas.openxmlformats.org/drawingml/2006/main">
               <a:ext uri="{FF2B5EF4-FFF2-40B4-BE49-F238E27FC236}">
-                <a16:creationId xmlns:a16="http://schemas.microsoft.com/office/drawing/2014/main" id="{E62AAC16-3236-4A6C-B24E-B11DEC0CB549}"/>
+                <a16:creationId xmlns:a16="http://schemas.microsoft.com/office/drawing/2014/main" id="{11ADA4D0-6468-4C84-AA7D-67B283D46E69}"/>
               </a:ext>
             </a:extLst>
           </p:cNvPr>
@@ -13452,7 +13460,7 @@
           <p:cNvPr id="9" name="">
             <a:extLst xmlns:a="http://schemas.openxmlformats.org/drawingml/2006/main">
               <a:ext uri="{FF2B5EF4-FFF2-40B4-BE49-F238E27FC236}">
-                <a16:creationId xmlns:a16="http://schemas.microsoft.com/office/drawing/2014/main" id="{41920074-23B2-410E-8E4B-328D30DA07C5}"/>
+                <a16:creationId xmlns:a16="http://schemas.microsoft.com/office/drawing/2014/main" id="{E43C15D2-AD89-4E7C-AFBE-39AC499EAEAE}"/>
               </a:ext>
             </a:extLst>
           </p:cNvPr>
@@ -13509,7 +13517,7 @@
           <p:cNvPr id="10" name="">
             <a:extLst xmlns:a="http://schemas.openxmlformats.org/drawingml/2006/main">
               <a:ext uri="{FF2B5EF4-FFF2-40B4-BE49-F238E27FC236}">
-                <a16:creationId xmlns:a16="http://schemas.microsoft.com/office/drawing/2014/main" id="{04E4AE7C-64F9-46ED-A278-FC84B3D0F65E}"/>
+                <a16:creationId xmlns:a16="http://schemas.microsoft.com/office/drawing/2014/main" id="{714D0260-A889-40E9-A020-E5C508EE3FF2}"/>
               </a:ext>
             </a:extLst>
           </p:cNvPr>
@@ -13543,7 +13551,7 @@
           <p:cNvPr id="11" name="">
             <a:extLst xmlns:a="http://schemas.openxmlformats.org/drawingml/2006/main">
               <a:ext uri="{FF2B5EF4-FFF2-40B4-BE49-F238E27FC236}">
-                <a16:creationId xmlns:a16="http://schemas.microsoft.com/office/drawing/2014/main" id="{DD6D32D9-AD9E-4CF1-BFC9-3196DFBFFB20}"/>
+                <a16:creationId xmlns:a16="http://schemas.microsoft.com/office/drawing/2014/main" id="{4D734A4F-7CC7-4F26-94B9-1E3E6E410800}"/>
               </a:ext>
             </a:extLst>
           </p:cNvPr>
@@ -13575,7 +13583,7 @@
           <p:cNvPr id="12" name="">
             <a:extLst xmlns:a="http://schemas.openxmlformats.org/drawingml/2006/main">
               <a:ext uri="{FF2B5EF4-FFF2-40B4-BE49-F238E27FC236}">
-                <a16:creationId xmlns:a16="http://schemas.microsoft.com/office/drawing/2014/main" id="{8112A7EE-3FAE-4D30-8587-CCA14C2936FB}"/>
+                <a16:creationId xmlns:a16="http://schemas.microsoft.com/office/drawing/2014/main" id="{939EFF12-E35F-4582-9483-1E9B9473D7D7}"/>
               </a:ext>
             </a:extLst>
           </p:cNvPr>
@@ -13632,7 +13640,7 @@
           <p:cNvPr id="13" name="">
             <a:extLst xmlns:a="http://schemas.openxmlformats.org/drawingml/2006/main">
               <a:ext uri="{FF2B5EF4-FFF2-40B4-BE49-F238E27FC236}">
-                <a16:creationId xmlns:a16="http://schemas.microsoft.com/office/drawing/2014/main" id="{77DF9991-4BB3-47D4-B030-D28F3C4BB620}"/>
+                <a16:creationId xmlns:a16="http://schemas.microsoft.com/office/drawing/2014/main" id="{3A75139C-40C9-4F35-A998-C1880FDE1F6A}"/>
               </a:ext>
             </a:extLst>
           </p:cNvPr>
@@ -13689,7 +13697,7 @@
           <p:cNvPr id="14" name="">
             <a:extLst xmlns:a="http://schemas.openxmlformats.org/drawingml/2006/main">
               <a:ext uri="{FF2B5EF4-FFF2-40B4-BE49-F238E27FC236}">
-                <a16:creationId xmlns:a16="http://schemas.microsoft.com/office/drawing/2014/main" id="{FE48E7C6-8D40-4E40-9B43-F138CD89EE1D}"/>
+                <a16:creationId xmlns:a16="http://schemas.microsoft.com/office/drawing/2014/main" id="{0DC93B50-E041-42D3-9C33-7196BCF8642D}"/>
               </a:ext>
             </a:extLst>
           </p:cNvPr>
@@ -13723,7 +13731,7 @@
           <p:cNvPr id="15" name="">
             <a:extLst xmlns:a="http://schemas.openxmlformats.org/drawingml/2006/main">
               <a:ext uri="{FF2B5EF4-FFF2-40B4-BE49-F238E27FC236}">
-                <a16:creationId xmlns:a16="http://schemas.microsoft.com/office/drawing/2014/main" id="{111B9626-469A-40DE-B915-9141E28DC87B}"/>
+                <a16:creationId xmlns:a16="http://schemas.microsoft.com/office/drawing/2014/main" id="{E8DB794B-53DF-4DD0-85E8-336EE3272F97}"/>
               </a:ext>
             </a:extLst>
           </p:cNvPr>
@@ -13755,7 +13763,7 @@
           <p:cNvPr id="16" name="">
             <a:extLst xmlns:a="http://schemas.openxmlformats.org/drawingml/2006/main">
               <a:ext uri="{FF2B5EF4-FFF2-40B4-BE49-F238E27FC236}">
-                <a16:creationId xmlns:a16="http://schemas.microsoft.com/office/drawing/2014/main" id="{AD4E243E-3885-4FDD-880D-BA696C06FDC5}"/>
+                <a16:creationId xmlns:a16="http://schemas.microsoft.com/office/drawing/2014/main" id="{D870D577-ADFD-4566-ABEA-EA87AAA39918}"/>
               </a:ext>
             </a:extLst>
           </p:cNvPr>
@@ -13812,7 +13820,7 @@
           <p:cNvPr id="17" name="">
             <a:extLst xmlns:a="http://schemas.openxmlformats.org/drawingml/2006/main">
               <a:ext uri="{FF2B5EF4-FFF2-40B4-BE49-F238E27FC236}">
-                <a16:creationId xmlns:a16="http://schemas.microsoft.com/office/drawing/2014/main" id="{69C56E70-B932-4E3D-9BA5-9678A3AA4604}"/>
+                <a16:creationId xmlns:a16="http://schemas.microsoft.com/office/drawing/2014/main" id="{ACE08E57-A1B2-4AF7-843E-C28264AE4404}"/>
               </a:ext>
             </a:extLst>
           </p:cNvPr>
@@ -13869,7 +13877,7 @@
           <p:cNvPr id="18" name="">
             <a:extLst xmlns:a="http://schemas.openxmlformats.org/drawingml/2006/main">
               <a:ext uri="{FF2B5EF4-FFF2-40B4-BE49-F238E27FC236}">
-                <a16:creationId xmlns:a16="http://schemas.microsoft.com/office/drawing/2014/main" id="{FC5D91AC-1EDB-4EDD-BC58-C1BBDD341187}"/>
+                <a16:creationId xmlns:a16="http://schemas.microsoft.com/office/drawing/2014/main" id="{74D5CB5F-FB71-41B3-A9C4-9E73647F3F84}"/>
               </a:ext>
             </a:extLst>
           </p:cNvPr>
@@ -13903,7 +13911,7 @@
           <p:cNvPr id="19" name="">
             <a:extLst xmlns:a="http://schemas.openxmlformats.org/drawingml/2006/main">
               <a:ext uri="{FF2B5EF4-FFF2-40B4-BE49-F238E27FC236}">
-                <a16:creationId xmlns:a16="http://schemas.microsoft.com/office/drawing/2014/main" id="{4A3DFEA3-4621-4A48-A320-A3BAE794A58C}"/>
+                <a16:creationId xmlns:a16="http://schemas.microsoft.com/office/drawing/2014/main" id="{C2857DC3-9E32-4C3F-A5A8-01C39E136960}"/>
               </a:ext>
             </a:extLst>
           </p:cNvPr>
@@ -13935,7 +13943,7 @@
           <p:cNvPr id="20" name="">
             <a:extLst xmlns:a="http://schemas.openxmlformats.org/drawingml/2006/main">
               <a:ext uri="{FF2B5EF4-FFF2-40B4-BE49-F238E27FC236}">
-                <a16:creationId xmlns:a16="http://schemas.microsoft.com/office/drawing/2014/main" id="{216453D5-31FB-4346-B619-785C925AE268}"/>
+                <a16:creationId xmlns:a16="http://schemas.microsoft.com/office/drawing/2014/main" id="{355B24F7-4A05-4299-93FF-17462CD0BB4C}"/>
               </a:ext>
             </a:extLst>
           </p:cNvPr>
@@ -13992,7 +14000,7 @@
           <p:cNvPr id="21" name="">
             <a:extLst xmlns:a="http://schemas.openxmlformats.org/drawingml/2006/main">
               <a:ext uri="{FF2B5EF4-FFF2-40B4-BE49-F238E27FC236}">
-                <a16:creationId xmlns:a16="http://schemas.microsoft.com/office/drawing/2014/main" id="{834D14C3-6290-4E89-B888-3F0336993516}"/>
+                <a16:creationId xmlns:a16="http://schemas.microsoft.com/office/drawing/2014/main" id="{4E326BBF-7624-4257-906D-9DC9F9510EF0}"/>
               </a:ext>
             </a:extLst>
           </p:cNvPr>
@@ -14047,7 +14055,7 @@
     </p:spTree>
     <p:extLst>
       <p:ext uri="{BB962C8B-B14F-4D97-AF65-F5344CB8AC3E}">
-        <p14:creationId xmlns:p14="http://schemas.microsoft.com/office/powerpoint/2010/main" val="2122940453"/>
+        <p14:creationId xmlns:p14="http://schemas.microsoft.com/office/powerpoint/2010/main" val="649284681"/>
       </p:ext>
     </p:extLst>
   </p:cSld>
